--- a/Cybersecurity session 2026-04-21.pptx
+++ b/Cybersecurity session 2026-04-21.pptx
@@ -5,7 +5,7 @@
     <p:sldMasterId id="2147483690" r:id="rId1"/>
   </p:sldMasterIdLst>
   <p:notesMasterIdLst>
-    <p:notesMasterId r:id="rId20"/>
+    <p:notesMasterId r:id="rId23"/>
   </p:notesMasterIdLst>
   <p:sldIdLst>
     <p:sldId id="256" r:id="rId2"/>
@@ -23,33 +23,36 @@
     <p:sldId id="319" r:id="rId14"/>
     <p:sldId id="320" r:id="rId15"/>
     <p:sldId id="321" r:id="rId16"/>
-    <p:sldId id="266" r:id="rId17"/>
-    <p:sldId id="265" r:id="rId18"/>
-    <p:sldId id="322" r:id="rId19"/>
+    <p:sldId id="323" r:id="rId17"/>
+    <p:sldId id="324" r:id="rId18"/>
+    <p:sldId id="325" r:id="rId19"/>
+    <p:sldId id="266" r:id="rId20"/>
+    <p:sldId id="265" r:id="rId21"/>
+    <p:sldId id="322" r:id="rId22"/>
   </p:sldIdLst>
   <p:sldSz cx="9144000" cy="5143500" type="screen16x9"/>
   <p:notesSz cx="6858000" cy="9144000"/>
   <p:embeddedFontLst>
     <p:embeddedFont>
       <p:font typeface="Prompt" panose="00000500000000000000" pitchFamily="2" charset="-34"/>
-      <p:regular r:id="rId21"/>
-      <p:bold r:id="rId22"/>
-      <p:italic r:id="rId23"/>
-      <p:boldItalic r:id="rId24"/>
+      <p:regular r:id="rId24"/>
+      <p:bold r:id="rId25"/>
+      <p:italic r:id="rId26"/>
+      <p:boldItalic r:id="rId27"/>
     </p:embeddedFont>
     <p:embeddedFont>
       <p:font typeface="Roboto Condensed" panose="02000000000000000000" pitchFamily="2" charset="0"/>
-      <p:regular r:id="rId25"/>
-      <p:bold r:id="rId26"/>
-      <p:italic r:id="rId27"/>
-      <p:boldItalic r:id="rId28"/>
+      <p:regular r:id="rId28"/>
+      <p:bold r:id="rId29"/>
+      <p:italic r:id="rId30"/>
+      <p:boldItalic r:id="rId31"/>
     </p:embeddedFont>
     <p:embeddedFont>
       <p:font typeface="Space Mono" panose="020B0604020202020204" charset="0"/>
-      <p:regular r:id="rId29"/>
-      <p:bold r:id="rId30"/>
-      <p:italic r:id="rId31"/>
-      <p:boldItalic r:id="rId32"/>
+      <p:regular r:id="rId32"/>
+      <p:bold r:id="rId33"/>
+      <p:italic r:id="rId34"/>
+      <p:boldItalic r:id="rId35"/>
     </p:embeddedFont>
   </p:embeddedFontLst>
   <p:defaultTextStyle>
@@ -281,6 +284,11 @@
       </a:defRPr>
     </a:lvl9pPr>
   </p:defaultTextStyle>
+  <p:extLst>
+    <p:ext uri="{EFAFB233-063F-42B5-8137-9DF3F51BA10A}">
+      <p15:sldGuideLst xmlns:p15="http://schemas.microsoft.com/office/powerpoint/2012/main"/>
+    </p:ext>
+  </p:extLst>
 </p:presentation>
 </file>
 
@@ -356,6 +364,13 @@
             <a:tailEnd type="none" w="sm" len="sm"/>
           </a:ln>
         </p:spPr>
+        <p:txBody>
+          <a:bodyPr/>
+          <a:lstStyle/>
+          <a:p>
+            <a:endParaRPr lang="en-US"/>
+          </a:p>
+        </p:txBody>
       </p:sp>
       <p:sp>
         <p:nvSpPr>
@@ -782,6 +797,13 @@
             </a:pathLst>
           </a:custGeom>
         </p:spPr>
+        <p:txBody>
+          <a:bodyPr/>
+          <a:lstStyle/>
+          <a:p>
+            <a:endParaRPr lang="en-US"/>
+          </a:p>
+        </p:txBody>
       </p:sp>
       <p:sp>
         <p:nvSpPr>
@@ -898,6 +920,13 @@
             </a:pathLst>
           </a:custGeom>
         </p:spPr>
+        <p:txBody>
+          <a:bodyPr/>
+          <a:lstStyle/>
+          <a:p>
+            <a:endParaRPr lang="en-US"/>
+          </a:p>
+        </p:txBody>
       </p:sp>
       <p:sp>
         <p:nvSpPr>
@@ -1025,6 +1054,13 @@
             </a:pathLst>
           </a:custGeom>
         </p:spPr>
+        <p:txBody>
+          <a:bodyPr/>
+          <a:lstStyle/>
+          <a:p>
+            <a:endParaRPr lang="en-US"/>
+          </a:p>
+        </p:txBody>
       </p:sp>
       <p:sp>
         <p:nvSpPr>
@@ -1152,6 +1188,13 @@
             </a:pathLst>
           </a:custGeom>
         </p:spPr>
+        <p:txBody>
+          <a:bodyPr/>
+          <a:lstStyle/>
+          <a:p>
+            <a:endParaRPr lang="en-US"/>
+          </a:p>
+        </p:txBody>
       </p:sp>
       <p:sp>
         <p:nvSpPr>
@@ -1279,6 +1322,13 @@
             </a:pathLst>
           </a:custGeom>
         </p:spPr>
+        <p:txBody>
+          <a:bodyPr/>
+          <a:lstStyle/>
+          <a:p>
+            <a:endParaRPr lang="en-US"/>
+          </a:p>
+        </p:txBody>
       </p:sp>
       <p:sp>
         <p:nvSpPr>
@@ -1406,6 +1456,13 @@
             </a:pathLst>
           </a:custGeom>
         </p:spPr>
+        <p:txBody>
+          <a:bodyPr/>
+          <a:lstStyle/>
+          <a:p>
+            <a:endParaRPr lang="en-US"/>
+          </a:p>
+        </p:txBody>
       </p:sp>
       <p:sp>
         <p:nvSpPr>
@@ -1533,6 +1590,13 @@
             </a:pathLst>
           </a:custGeom>
         </p:spPr>
+        <p:txBody>
+          <a:bodyPr/>
+          <a:lstStyle/>
+          <a:p>
+            <a:endParaRPr lang="en-US"/>
+          </a:p>
+        </p:txBody>
       </p:sp>
       <p:sp>
         <p:nvSpPr>
@@ -1592,6 +1656,408 @@
 </file>
 
 <file path=ppt/notesSlides/notesSlide16.xml><?xml version="1.0" encoding="utf-8"?>
+<p:notes xmlns:a="http://schemas.openxmlformats.org/drawingml/2006/main" xmlns:r="http://schemas.openxmlformats.org/officeDocument/2006/relationships" xmlns:p="http://schemas.openxmlformats.org/presentationml/2006/main" showMasterSp="0" showMasterPhAnim="0">
+  <p:cSld>
+    <p:spTree>
+      <p:nvGrpSpPr>
+        <p:cNvPr id="1" name="Shape 397">
+          <a:extLst>
+            <a:ext uri="{FF2B5EF4-FFF2-40B4-BE49-F238E27FC236}">
+              <a16:creationId xmlns:a16="http://schemas.microsoft.com/office/drawing/2014/main" id="{80157A31-8DD7-304C-FF6A-060DD8A6A963}"/>
+            </a:ext>
+          </a:extLst>
+        </p:cNvPr>
+        <p:cNvGrpSpPr/>
+        <p:nvPr/>
+      </p:nvGrpSpPr>
+      <p:grpSpPr>
+        <a:xfrm>
+          <a:off x="0" y="0"/>
+          <a:ext cx="0" cy="0"/>
+          <a:chOff x="0" y="0"/>
+          <a:chExt cx="0" cy="0"/>
+        </a:xfrm>
+      </p:grpSpPr>
+      <p:sp>
+        <p:nvSpPr>
+          <p:cNvPr id="398" name="Google Shape;398;g15711de2763_0_119:notes">
+            <a:extLst>
+              <a:ext uri="{FF2B5EF4-FFF2-40B4-BE49-F238E27FC236}">
+                <a16:creationId xmlns:a16="http://schemas.microsoft.com/office/drawing/2014/main" id="{F16CBD41-0C73-28AE-D4C3-DB52BDB39681}"/>
+              </a:ext>
+            </a:extLst>
+          </p:cNvPr>
+          <p:cNvSpPr>
+            <a:spLocks noGrp="1" noRot="1" noChangeAspect="1"/>
+          </p:cNvSpPr>
+          <p:nvPr>
+            <p:ph type="sldImg" idx="2"/>
+          </p:nvPr>
+        </p:nvSpPr>
+        <p:spPr>
+          <a:xfrm>
+            <a:off x="381000" y="685800"/>
+            <a:ext cx="6096000" cy="3429000"/>
+          </a:xfrm>
+          <a:custGeom>
+            <a:avLst/>
+            <a:gdLst/>
+            <a:ahLst/>
+            <a:cxnLst/>
+            <a:rect l="l" t="t" r="r" b="b"/>
+            <a:pathLst>
+              <a:path w="120000" h="120000" extrusionOk="0">
+                <a:moveTo>
+                  <a:pt x="0" y="0"/>
+                </a:moveTo>
+                <a:lnTo>
+                  <a:pt x="120000" y="0"/>
+                </a:lnTo>
+                <a:lnTo>
+                  <a:pt x="120000" y="120000"/>
+                </a:lnTo>
+                <a:lnTo>
+                  <a:pt x="0" y="120000"/>
+                </a:lnTo>
+                <a:close/>
+              </a:path>
+            </a:pathLst>
+          </a:custGeom>
+        </p:spPr>
+        <p:txBody>
+          <a:bodyPr/>
+          <a:lstStyle/>
+          <a:p>
+            <a:endParaRPr lang="en-US"/>
+          </a:p>
+        </p:txBody>
+      </p:sp>
+      <p:sp>
+        <p:nvSpPr>
+          <p:cNvPr id="399" name="Google Shape;399;g15711de2763_0_119:notes">
+            <a:extLst>
+              <a:ext uri="{FF2B5EF4-FFF2-40B4-BE49-F238E27FC236}">
+                <a16:creationId xmlns:a16="http://schemas.microsoft.com/office/drawing/2014/main" id="{35DC2BF3-5E0A-BA55-2709-B6FD13F0FB3E}"/>
+              </a:ext>
+            </a:extLst>
+          </p:cNvPr>
+          <p:cNvSpPr txBox="1">
+            <a:spLocks noGrp="1"/>
+          </p:cNvSpPr>
+          <p:nvPr>
+            <p:ph type="body" idx="1"/>
+          </p:nvPr>
+        </p:nvSpPr>
+        <p:spPr>
+          <a:xfrm>
+            <a:off x="685800" y="4343400"/>
+            <a:ext cx="5486400" cy="4114800"/>
+          </a:xfrm>
+          <a:prstGeom prst="rect">
+            <a:avLst/>
+          </a:prstGeom>
+        </p:spPr>
+        <p:txBody>
+          <a:bodyPr spcFirstLastPara="1" wrap="square" lIns="91425" tIns="91425" rIns="91425" bIns="91425" anchor="t" anchorCtr="0">
+            <a:noAutofit/>
+          </a:bodyPr>
+          <a:lstStyle/>
+          <a:p>
+            <a:pPr marL="0" lvl="0" indent="0" algn="l" rtl="0">
+              <a:spcBef>
+                <a:spcPts val="0"/>
+              </a:spcBef>
+              <a:spcAft>
+                <a:spcPts val="0"/>
+              </a:spcAft>
+              <a:buNone/>
+            </a:pPr>
+            <a:endParaRPr dirty="0"/>
+          </a:p>
+        </p:txBody>
+      </p:sp>
+    </p:spTree>
+    <p:extLst>
+      <p:ext uri="{BB962C8B-B14F-4D97-AF65-F5344CB8AC3E}">
+        <p14:creationId xmlns:p14="http://schemas.microsoft.com/office/powerpoint/2010/main" val="2997970031"/>
+      </p:ext>
+    </p:extLst>
+  </p:cSld>
+  <p:clrMapOvr>
+    <a:masterClrMapping/>
+  </p:clrMapOvr>
+</p:notes>
+</file>
+
+<file path=ppt/notesSlides/notesSlide17.xml><?xml version="1.0" encoding="utf-8"?>
+<p:notes xmlns:a="http://schemas.openxmlformats.org/drawingml/2006/main" xmlns:r="http://schemas.openxmlformats.org/officeDocument/2006/relationships" xmlns:p="http://schemas.openxmlformats.org/presentationml/2006/main" showMasterSp="0" showMasterPhAnim="0">
+  <p:cSld>
+    <p:spTree>
+      <p:nvGrpSpPr>
+        <p:cNvPr id="1" name="Shape 397">
+          <a:extLst>
+            <a:ext uri="{FF2B5EF4-FFF2-40B4-BE49-F238E27FC236}">
+              <a16:creationId xmlns:a16="http://schemas.microsoft.com/office/drawing/2014/main" id="{F16E4C22-5334-C680-29E5-BCE9B7FED5E0}"/>
+            </a:ext>
+          </a:extLst>
+        </p:cNvPr>
+        <p:cNvGrpSpPr/>
+        <p:nvPr/>
+      </p:nvGrpSpPr>
+      <p:grpSpPr>
+        <a:xfrm>
+          <a:off x="0" y="0"/>
+          <a:ext cx="0" cy="0"/>
+          <a:chOff x="0" y="0"/>
+          <a:chExt cx="0" cy="0"/>
+        </a:xfrm>
+      </p:grpSpPr>
+      <p:sp>
+        <p:nvSpPr>
+          <p:cNvPr id="398" name="Google Shape;398;g15711de2763_0_119:notes">
+            <a:extLst>
+              <a:ext uri="{FF2B5EF4-FFF2-40B4-BE49-F238E27FC236}">
+                <a16:creationId xmlns:a16="http://schemas.microsoft.com/office/drawing/2014/main" id="{4E008F52-7921-A067-8997-44BE9F1B6F21}"/>
+              </a:ext>
+            </a:extLst>
+          </p:cNvPr>
+          <p:cNvSpPr>
+            <a:spLocks noGrp="1" noRot="1" noChangeAspect="1"/>
+          </p:cNvSpPr>
+          <p:nvPr>
+            <p:ph type="sldImg" idx="2"/>
+          </p:nvPr>
+        </p:nvSpPr>
+        <p:spPr>
+          <a:xfrm>
+            <a:off x="381000" y="685800"/>
+            <a:ext cx="6096000" cy="3429000"/>
+          </a:xfrm>
+          <a:custGeom>
+            <a:avLst/>
+            <a:gdLst/>
+            <a:ahLst/>
+            <a:cxnLst/>
+            <a:rect l="l" t="t" r="r" b="b"/>
+            <a:pathLst>
+              <a:path w="120000" h="120000" extrusionOk="0">
+                <a:moveTo>
+                  <a:pt x="0" y="0"/>
+                </a:moveTo>
+                <a:lnTo>
+                  <a:pt x="120000" y="0"/>
+                </a:lnTo>
+                <a:lnTo>
+                  <a:pt x="120000" y="120000"/>
+                </a:lnTo>
+                <a:lnTo>
+                  <a:pt x="0" y="120000"/>
+                </a:lnTo>
+                <a:close/>
+              </a:path>
+            </a:pathLst>
+          </a:custGeom>
+        </p:spPr>
+        <p:txBody>
+          <a:bodyPr/>
+          <a:lstStyle/>
+          <a:p>
+            <a:endParaRPr lang="en-US"/>
+          </a:p>
+        </p:txBody>
+      </p:sp>
+      <p:sp>
+        <p:nvSpPr>
+          <p:cNvPr id="399" name="Google Shape;399;g15711de2763_0_119:notes">
+            <a:extLst>
+              <a:ext uri="{FF2B5EF4-FFF2-40B4-BE49-F238E27FC236}">
+                <a16:creationId xmlns:a16="http://schemas.microsoft.com/office/drawing/2014/main" id="{60264FA1-6703-7BFA-2701-82911379F4B2}"/>
+              </a:ext>
+            </a:extLst>
+          </p:cNvPr>
+          <p:cNvSpPr txBox="1">
+            <a:spLocks noGrp="1"/>
+          </p:cNvSpPr>
+          <p:nvPr>
+            <p:ph type="body" idx="1"/>
+          </p:nvPr>
+        </p:nvSpPr>
+        <p:spPr>
+          <a:xfrm>
+            <a:off x="685800" y="4343400"/>
+            <a:ext cx="5486400" cy="4114800"/>
+          </a:xfrm>
+          <a:prstGeom prst="rect">
+            <a:avLst/>
+          </a:prstGeom>
+        </p:spPr>
+        <p:txBody>
+          <a:bodyPr spcFirstLastPara="1" wrap="square" lIns="91425" tIns="91425" rIns="91425" bIns="91425" anchor="t" anchorCtr="0">
+            <a:noAutofit/>
+          </a:bodyPr>
+          <a:lstStyle/>
+          <a:p>
+            <a:pPr marL="0" lvl="0" indent="0" algn="l" rtl="0">
+              <a:spcBef>
+                <a:spcPts val="0"/>
+              </a:spcBef>
+              <a:spcAft>
+                <a:spcPts val="0"/>
+              </a:spcAft>
+              <a:buNone/>
+            </a:pPr>
+            <a:endParaRPr dirty="0"/>
+          </a:p>
+        </p:txBody>
+      </p:sp>
+    </p:spTree>
+    <p:extLst>
+      <p:ext uri="{BB962C8B-B14F-4D97-AF65-F5344CB8AC3E}">
+        <p14:creationId xmlns:p14="http://schemas.microsoft.com/office/powerpoint/2010/main" val="3389695126"/>
+      </p:ext>
+    </p:extLst>
+  </p:cSld>
+  <p:clrMapOvr>
+    <a:masterClrMapping/>
+  </p:clrMapOvr>
+</p:notes>
+</file>
+
+<file path=ppt/notesSlides/notesSlide18.xml><?xml version="1.0" encoding="utf-8"?>
+<p:notes xmlns:a="http://schemas.openxmlformats.org/drawingml/2006/main" xmlns:r="http://schemas.openxmlformats.org/officeDocument/2006/relationships" xmlns:p="http://schemas.openxmlformats.org/presentationml/2006/main" showMasterSp="0" showMasterPhAnim="0">
+  <p:cSld>
+    <p:spTree>
+      <p:nvGrpSpPr>
+        <p:cNvPr id="1" name="Shape 397">
+          <a:extLst>
+            <a:ext uri="{FF2B5EF4-FFF2-40B4-BE49-F238E27FC236}">
+              <a16:creationId xmlns:a16="http://schemas.microsoft.com/office/drawing/2014/main" id="{79C68C1D-93E0-E24E-03EB-665FBA29C213}"/>
+            </a:ext>
+          </a:extLst>
+        </p:cNvPr>
+        <p:cNvGrpSpPr/>
+        <p:nvPr/>
+      </p:nvGrpSpPr>
+      <p:grpSpPr>
+        <a:xfrm>
+          <a:off x="0" y="0"/>
+          <a:ext cx="0" cy="0"/>
+          <a:chOff x="0" y="0"/>
+          <a:chExt cx="0" cy="0"/>
+        </a:xfrm>
+      </p:grpSpPr>
+      <p:sp>
+        <p:nvSpPr>
+          <p:cNvPr id="398" name="Google Shape;398;g15711de2763_0_119:notes">
+            <a:extLst>
+              <a:ext uri="{FF2B5EF4-FFF2-40B4-BE49-F238E27FC236}">
+                <a16:creationId xmlns:a16="http://schemas.microsoft.com/office/drawing/2014/main" id="{EADA7E7D-D924-9599-3E2E-B202AA2A2802}"/>
+              </a:ext>
+            </a:extLst>
+          </p:cNvPr>
+          <p:cNvSpPr>
+            <a:spLocks noGrp="1" noRot="1" noChangeAspect="1"/>
+          </p:cNvSpPr>
+          <p:nvPr>
+            <p:ph type="sldImg" idx="2"/>
+          </p:nvPr>
+        </p:nvSpPr>
+        <p:spPr>
+          <a:xfrm>
+            <a:off x="381000" y="685800"/>
+            <a:ext cx="6096000" cy="3429000"/>
+          </a:xfrm>
+          <a:custGeom>
+            <a:avLst/>
+            <a:gdLst/>
+            <a:ahLst/>
+            <a:cxnLst/>
+            <a:rect l="l" t="t" r="r" b="b"/>
+            <a:pathLst>
+              <a:path w="120000" h="120000" extrusionOk="0">
+                <a:moveTo>
+                  <a:pt x="0" y="0"/>
+                </a:moveTo>
+                <a:lnTo>
+                  <a:pt x="120000" y="0"/>
+                </a:lnTo>
+                <a:lnTo>
+                  <a:pt x="120000" y="120000"/>
+                </a:lnTo>
+                <a:lnTo>
+                  <a:pt x="0" y="120000"/>
+                </a:lnTo>
+                <a:close/>
+              </a:path>
+            </a:pathLst>
+          </a:custGeom>
+        </p:spPr>
+        <p:txBody>
+          <a:bodyPr/>
+          <a:lstStyle/>
+          <a:p>
+            <a:endParaRPr lang="en-US"/>
+          </a:p>
+        </p:txBody>
+      </p:sp>
+      <p:sp>
+        <p:nvSpPr>
+          <p:cNvPr id="399" name="Google Shape;399;g15711de2763_0_119:notes">
+            <a:extLst>
+              <a:ext uri="{FF2B5EF4-FFF2-40B4-BE49-F238E27FC236}">
+                <a16:creationId xmlns:a16="http://schemas.microsoft.com/office/drawing/2014/main" id="{F77DB9DF-0B36-C272-A750-84E2CA54B9FA}"/>
+              </a:ext>
+            </a:extLst>
+          </p:cNvPr>
+          <p:cNvSpPr txBox="1">
+            <a:spLocks noGrp="1"/>
+          </p:cNvSpPr>
+          <p:nvPr>
+            <p:ph type="body" idx="1"/>
+          </p:nvPr>
+        </p:nvSpPr>
+        <p:spPr>
+          <a:xfrm>
+            <a:off x="685800" y="4343400"/>
+            <a:ext cx="5486400" cy="4114800"/>
+          </a:xfrm>
+          <a:prstGeom prst="rect">
+            <a:avLst/>
+          </a:prstGeom>
+        </p:spPr>
+        <p:txBody>
+          <a:bodyPr spcFirstLastPara="1" wrap="square" lIns="91425" tIns="91425" rIns="91425" bIns="91425" anchor="t" anchorCtr="0">
+            <a:noAutofit/>
+          </a:bodyPr>
+          <a:lstStyle/>
+          <a:p>
+            <a:pPr marL="0" lvl="0" indent="0" algn="l" rtl="0">
+              <a:spcBef>
+                <a:spcPts val="0"/>
+              </a:spcBef>
+              <a:spcAft>
+                <a:spcPts val="0"/>
+              </a:spcAft>
+              <a:buNone/>
+            </a:pPr>
+            <a:endParaRPr dirty="0"/>
+          </a:p>
+        </p:txBody>
+      </p:sp>
+    </p:spTree>
+    <p:extLst>
+      <p:ext uri="{BB962C8B-B14F-4D97-AF65-F5344CB8AC3E}">
+        <p14:creationId xmlns:p14="http://schemas.microsoft.com/office/powerpoint/2010/main" val="2403956109"/>
+      </p:ext>
+    </p:extLst>
+  </p:cSld>
+  <p:clrMapOvr>
+    <a:masterClrMapping/>
+  </p:clrMapOvr>
+</p:notes>
+</file>
+
+<file path=ppt/notesSlides/notesSlide19.xml><?xml version="1.0" encoding="utf-8"?>
 <p:notes xmlns:a="http://schemas.openxmlformats.org/drawingml/2006/main" xmlns:r="http://schemas.openxmlformats.org/officeDocument/2006/relationships" xmlns:p="http://schemas.openxmlformats.org/presentationml/2006/main" showMasterSp="0" showMasterPhAnim="0">
   <p:cSld>
     <p:spTree>
@@ -1648,6 +2114,13 @@
             </a:pathLst>
           </a:custGeom>
         </p:spPr>
+        <p:txBody>
+          <a:bodyPr/>
+          <a:lstStyle/>
+          <a:p>
+            <a:endParaRPr lang="en-US"/>
+          </a:p>
+        </p:txBody>
       </p:sp>
       <p:sp>
         <p:nvSpPr>
@@ -1695,7 +2168,118 @@
 </p:notes>
 </file>
 
-<file path=ppt/notesSlides/notesSlide17.xml><?xml version="1.0" encoding="utf-8"?>
+<file path=ppt/notesSlides/notesSlide2.xml><?xml version="1.0" encoding="utf-8"?>
+<p:notes xmlns:a="http://schemas.openxmlformats.org/drawingml/2006/main" xmlns:r="http://schemas.openxmlformats.org/officeDocument/2006/relationships" xmlns:p="http://schemas.openxmlformats.org/presentationml/2006/main" showMasterSp="0" showMasterPhAnim="0">
+  <p:cSld>
+    <p:spTree>
+      <p:nvGrpSpPr>
+        <p:cNvPr id="1" name="Shape 290"/>
+        <p:cNvGrpSpPr/>
+        <p:nvPr/>
+      </p:nvGrpSpPr>
+      <p:grpSpPr>
+        <a:xfrm>
+          <a:off x="0" y="0"/>
+          <a:ext cx="0" cy="0"/>
+          <a:chOff x="0" y="0"/>
+          <a:chExt cx="0" cy="0"/>
+        </a:xfrm>
+      </p:grpSpPr>
+      <p:sp>
+        <p:nvSpPr>
+          <p:cNvPr id="291" name="Google Shape;291;g1569b59b089_0_59:notes"/>
+          <p:cNvSpPr>
+            <a:spLocks noGrp="1" noRot="1" noChangeAspect="1"/>
+          </p:cNvSpPr>
+          <p:nvPr>
+            <p:ph type="sldImg" idx="2"/>
+          </p:nvPr>
+        </p:nvSpPr>
+        <p:spPr>
+          <a:xfrm>
+            <a:off x="381000" y="685800"/>
+            <a:ext cx="6096000" cy="3429000"/>
+          </a:xfrm>
+          <a:custGeom>
+            <a:avLst/>
+            <a:gdLst/>
+            <a:ahLst/>
+            <a:cxnLst/>
+            <a:rect l="l" t="t" r="r" b="b"/>
+            <a:pathLst>
+              <a:path w="120000" h="120000" extrusionOk="0">
+                <a:moveTo>
+                  <a:pt x="0" y="0"/>
+                </a:moveTo>
+                <a:lnTo>
+                  <a:pt x="120000" y="0"/>
+                </a:lnTo>
+                <a:lnTo>
+                  <a:pt x="120000" y="120000"/>
+                </a:lnTo>
+                <a:lnTo>
+                  <a:pt x="0" y="120000"/>
+                </a:lnTo>
+                <a:close/>
+              </a:path>
+            </a:pathLst>
+          </a:custGeom>
+        </p:spPr>
+        <p:txBody>
+          <a:bodyPr/>
+          <a:lstStyle/>
+          <a:p>
+            <a:endParaRPr lang="en-US"/>
+          </a:p>
+        </p:txBody>
+      </p:sp>
+      <p:sp>
+        <p:nvSpPr>
+          <p:cNvPr id="292" name="Google Shape;292;g1569b59b089_0_59:notes"/>
+          <p:cNvSpPr txBox="1">
+            <a:spLocks noGrp="1"/>
+          </p:cNvSpPr>
+          <p:nvPr>
+            <p:ph type="body" idx="1"/>
+          </p:nvPr>
+        </p:nvSpPr>
+        <p:spPr>
+          <a:xfrm>
+            <a:off x="685800" y="4343400"/>
+            <a:ext cx="5486400" cy="4114800"/>
+          </a:xfrm>
+          <a:prstGeom prst="rect">
+            <a:avLst/>
+          </a:prstGeom>
+        </p:spPr>
+        <p:txBody>
+          <a:bodyPr spcFirstLastPara="1" wrap="square" lIns="91425" tIns="91425" rIns="91425" bIns="91425" anchor="t" anchorCtr="0">
+            <a:noAutofit/>
+          </a:bodyPr>
+          <a:lstStyle/>
+          <a:p>
+            <a:pPr marL="0" lvl="0" indent="0" algn="l" rtl="0">
+              <a:spcBef>
+                <a:spcPts val="0"/>
+              </a:spcBef>
+              <a:spcAft>
+                <a:spcPts val="0"/>
+              </a:spcAft>
+              <a:buNone/>
+            </a:pPr>
+            <a:endParaRPr/>
+          </a:p>
+        </p:txBody>
+      </p:sp>
+    </p:spTree>
+  </p:cSld>
+  <p:clrMapOvr>
+    <a:masterClrMapping/>
+  </p:clrMapOvr>
+</p:notes>
+</file>
+
+<file path=ppt/notesSlides/notesSlide20.xml><?xml version="1.0" encoding="utf-8"?>
 <p:notes xmlns:a="http://schemas.openxmlformats.org/drawingml/2006/main" xmlns:r="http://schemas.openxmlformats.org/officeDocument/2006/relationships" xmlns:p="http://schemas.openxmlformats.org/presentationml/2006/main" showMasterSp="0" showMasterPhAnim="0">
   <p:cSld>
     <p:spTree>
@@ -1752,6 +2336,13 @@
             </a:pathLst>
           </a:custGeom>
         </p:spPr>
+        <p:txBody>
+          <a:bodyPr/>
+          <a:lstStyle/>
+          <a:p>
+            <a:endParaRPr lang="en-US"/>
+          </a:p>
+        </p:txBody>
       </p:sp>
       <p:sp>
         <p:nvSpPr>
@@ -1799,7 +2390,7 @@
 </p:notes>
 </file>
 
-<file path=ppt/notesSlides/notesSlide18.xml><?xml version="1.0" encoding="utf-8"?>
+<file path=ppt/notesSlides/notesSlide21.xml><?xml version="1.0" encoding="utf-8"?>
 <p:notes xmlns:a="http://schemas.openxmlformats.org/drawingml/2006/main" xmlns:r="http://schemas.openxmlformats.org/officeDocument/2006/relationships" xmlns:p="http://schemas.openxmlformats.org/presentationml/2006/main" showMasterSp="0" showMasterPhAnim="0">
   <p:cSld>
     <p:spTree>
@@ -1868,6 +2459,13 @@
             </a:pathLst>
           </a:custGeom>
         </p:spPr>
+        <p:txBody>
+          <a:bodyPr/>
+          <a:lstStyle/>
+          <a:p>
+            <a:endParaRPr lang="en-US"/>
+          </a:p>
+        </p:txBody>
       </p:sp>
       <p:sp>
         <p:nvSpPr>
@@ -1919,110 +2517,6 @@
         <p14:creationId xmlns:p14="http://schemas.microsoft.com/office/powerpoint/2010/main" val="2721402624"/>
       </p:ext>
     </p:extLst>
-  </p:cSld>
-  <p:clrMapOvr>
-    <a:masterClrMapping/>
-  </p:clrMapOvr>
-</p:notes>
-</file>
-
-<file path=ppt/notesSlides/notesSlide2.xml><?xml version="1.0" encoding="utf-8"?>
-<p:notes xmlns:a="http://schemas.openxmlformats.org/drawingml/2006/main" xmlns:r="http://schemas.openxmlformats.org/officeDocument/2006/relationships" xmlns:p="http://schemas.openxmlformats.org/presentationml/2006/main" showMasterSp="0" showMasterPhAnim="0">
-  <p:cSld>
-    <p:spTree>
-      <p:nvGrpSpPr>
-        <p:cNvPr id="1" name="Shape 290"/>
-        <p:cNvGrpSpPr/>
-        <p:nvPr/>
-      </p:nvGrpSpPr>
-      <p:grpSpPr>
-        <a:xfrm>
-          <a:off x="0" y="0"/>
-          <a:ext cx="0" cy="0"/>
-          <a:chOff x="0" y="0"/>
-          <a:chExt cx="0" cy="0"/>
-        </a:xfrm>
-      </p:grpSpPr>
-      <p:sp>
-        <p:nvSpPr>
-          <p:cNvPr id="291" name="Google Shape;291;g1569b59b089_0_59:notes"/>
-          <p:cNvSpPr>
-            <a:spLocks noGrp="1" noRot="1" noChangeAspect="1"/>
-          </p:cNvSpPr>
-          <p:nvPr>
-            <p:ph type="sldImg" idx="2"/>
-          </p:nvPr>
-        </p:nvSpPr>
-        <p:spPr>
-          <a:xfrm>
-            <a:off x="381000" y="685800"/>
-            <a:ext cx="6096000" cy="3429000"/>
-          </a:xfrm>
-          <a:custGeom>
-            <a:avLst/>
-            <a:gdLst/>
-            <a:ahLst/>
-            <a:cxnLst/>
-            <a:rect l="l" t="t" r="r" b="b"/>
-            <a:pathLst>
-              <a:path w="120000" h="120000" extrusionOk="0">
-                <a:moveTo>
-                  <a:pt x="0" y="0"/>
-                </a:moveTo>
-                <a:lnTo>
-                  <a:pt x="120000" y="0"/>
-                </a:lnTo>
-                <a:lnTo>
-                  <a:pt x="120000" y="120000"/>
-                </a:lnTo>
-                <a:lnTo>
-                  <a:pt x="0" y="120000"/>
-                </a:lnTo>
-                <a:close/>
-              </a:path>
-            </a:pathLst>
-          </a:custGeom>
-        </p:spPr>
-      </p:sp>
-      <p:sp>
-        <p:nvSpPr>
-          <p:cNvPr id="292" name="Google Shape;292;g1569b59b089_0_59:notes"/>
-          <p:cNvSpPr txBox="1">
-            <a:spLocks noGrp="1"/>
-          </p:cNvSpPr>
-          <p:nvPr>
-            <p:ph type="body" idx="1"/>
-          </p:nvPr>
-        </p:nvSpPr>
-        <p:spPr>
-          <a:xfrm>
-            <a:off x="685800" y="4343400"/>
-            <a:ext cx="5486400" cy="4114800"/>
-          </a:xfrm>
-          <a:prstGeom prst="rect">
-            <a:avLst/>
-          </a:prstGeom>
-        </p:spPr>
-        <p:txBody>
-          <a:bodyPr spcFirstLastPara="1" wrap="square" lIns="91425" tIns="91425" rIns="91425" bIns="91425" anchor="t" anchorCtr="0">
-            <a:noAutofit/>
-          </a:bodyPr>
-          <a:lstStyle/>
-          <a:p>
-            <a:pPr marL="0" lvl="0" indent="0" algn="l" rtl="0">
-              <a:spcBef>
-                <a:spcPts val="0"/>
-              </a:spcBef>
-              <a:spcAft>
-                <a:spcPts val="0"/>
-              </a:spcAft>
-              <a:buNone/>
-            </a:pPr>
-            <a:endParaRPr/>
-          </a:p>
-        </p:txBody>
-      </p:sp>
-    </p:spTree>
   </p:cSld>
   <p:clrMapOvr>
     <a:masterClrMapping/>
@@ -2087,6 +2581,13 @@
             </a:pathLst>
           </a:custGeom>
         </p:spPr>
+        <p:txBody>
+          <a:bodyPr/>
+          <a:lstStyle/>
+          <a:p>
+            <a:endParaRPr lang="en-US"/>
+          </a:p>
+        </p:txBody>
       </p:sp>
       <p:sp>
         <p:nvSpPr>
@@ -2191,6 +2692,13 @@
             </a:pathLst>
           </a:custGeom>
         </p:spPr>
+        <p:txBody>
+          <a:bodyPr/>
+          <a:lstStyle/>
+          <a:p>
+            <a:endParaRPr lang="en-US"/>
+          </a:p>
+        </p:txBody>
       </p:sp>
       <p:sp>
         <p:nvSpPr>
@@ -2307,6 +2815,13 @@
             </a:pathLst>
           </a:custGeom>
         </p:spPr>
+        <p:txBody>
+          <a:bodyPr/>
+          <a:lstStyle/>
+          <a:p>
+            <a:endParaRPr lang="en-US"/>
+          </a:p>
+        </p:txBody>
       </p:sp>
       <p:sp>
         <p:nvSpPr>
@@ -2434,6 +2949,13 @@
             </a:pathLst>
           </a:custGeom>
         </p:spPr>
+        <p:txBody>
+          <a:bodyPr/>
+          <a:lstStyle/>
+          <a:p>
+            <a:endParaRPr lang="en-US"/>
+          </a:p>
+        </p:txBody>
       </p:sp>
       <p:sp>
         <p:nvSpPr>
@@ -2549,6 +3071,13 @@
             </a:pathLst>
           </a:custGeom>
         </p:spPr>
+        <p:txBody>
+          <a:bodyPr/>
+          <a:lstStyle/>
+          <a:p>
+            <a:endParaRPr lang="en-US"/>
+          </a:p>
+        </p:txBody>
       </p:sp>
       <p:sp>
         <p:nvSpPr>
@@ -2653,6 +3182,13 @@
             </a:pathLst>
           </a:custGeom>
         </p:spPr>
+        <p:txBody>
+          <a:bodyPr/>
+          <a:lstStyle/>
+          <a:p>
+            <a:endParaRPr lang="en-US"/>
+          </a:p>
+        </p:txBody>
       </p:sp>
       <p:sp>
         <p:nvSpPr>
@@ -2769,6 +3305,13 @@
             </a:pathLst>
           </a:custGeom>
         </p:spPr>
+        <p:txBody>
+          <a:bodyPr/>
+          <a:lstStyle/>
+          <a:p>
+            <a:endParaRPr lang="en-US"/>
+          </a:p>
+        </p:txBody>
       </p:sp>
       <p:sp>
         <p:nvSpPr>
@@ -11297,7 +11840,7 @@
             </a:pPr>
             <a:r>
               <a:rPr lang="en" dirty="0"/>
-              <a:t>Resources</a:t>
+              <a:t>Newsletters</a:t>
             </a:r>
             <a:endParaRPr dirty="0"/>
           </a:p>
@@ -11334,76 +11877,187 @@
           </a:bodyPr>
           <a:lstStyle/>
           <a:p>
-            <a:pPr marL="342900" lvl="0" indent="-342900">
+            <a:pPr marL="285750" lvl="0" indent="-285750">
               <a:buSzPts val="1100"/>
-              <a:buAutoNum type="arabicPeriod"/>
+              <a:buFontTx/>
+              <a:buChar char="-"/>
             </a:pPr>
             <a:r>
               <a:rPr lang="en-US" dirty="0">
                 <a:hlinkClick r:id="rId3"/>
               </a:rPr>
-              <a:t>https://www.cisco.com/site/us/en/learn/topics/security/what-is-cybersecurity.html</a:t>
+              <a:t>Krebs on security (weekly)</a:t>
             </a:r>
-            <a:endParaRPr lang="en-US" dirty="0"/>
-          </a:p>
-          <a:p>
-            <a:pPr marL="342900" lvl="0" indent="-342900">
+          </a:p>
+          <a:p>
+            <a:pPr marL="285750" lvl="0" indent="-285750">
               <a:buSzPts val="1100"/>
-              <a:buAutoNum type="arabicPeriod"/>
+              <a:buFontTx/>
+              <a:buChar char="-"/>
+            </a:pPr>
+            <a:endParaRPr lang="en-US" dirty="0">
+              <a:hlinkClick r:id="rId3"/>
+            </a:endParaRPr>
+          </a:p>
+          <a:p>
+            <a:pPr marL="285750" lvl="0" indent="-285750">
+              <a:buSzPts val="1100"/>
+              <a:buFontTx/>
+              <a:buChar char="-"/>
             </a:pPr>
             <a:r>
               <a:rPr lang="en-US" dirty="0">
                 <a:hlinkClick r:id="rId4"/>
               </a:rPr>
-              <a:t>https://www.hotcourses.ae/study-abroad-info/careers-prospects/cybersecurity-jobs/</a:t>
+              <a:t>SANS </a:t>
             </a:r>
+            <a:r>
+              <a:rPr lang="en-US" dirty="0" err="1">
+                <a:hlinkClick r:id="rId4"/>
+              </a:rPr>
+              <a:t>newsbites</a:t>
+            </a:r>
+            <a:r>
+              <a:rPr lang="en-US" dirty="0">
+                <a:hlinkClick r:id="rId4"/>
+              </a:rPr>
+              <a:t> </a:t>
+            </a:r>
+            <a:r>
+              <a:rPr lang="en-US" dirty="0"/>
+              <a:t> (bi-weekly)</a:t>
+            </a:r>
+          </a:p>
+          <a:p>
+            <a:pPr marL="285750" lvl="0" indent="-285750">
+              <a:buSzPts val="1100"/>
+              <a:buFontTx/>
+              <a:buChar char="-"/>
+            </a:pPr>
             <a:endParaRPr lang="en-US" dirty="0"/>
           </a:p>
           <a:p>
-            <a:pPr marL="342900" lvl="0" indent="-342900">
+            <a:pPr marL="285750" lvl="0" indent="-285750">
               <a:buSzPts val="1100"/>
-              <a:buAutoNum type="arabicPeriod"/>
+              <a:buFontTx/>
+              <a:buChar char="-"/>
             </a:pPr>
             <a:r>
               <a:rPr lang="en-US" dirty="0">
                 <a:hlinkClick r:id="rId5"/>
               </a:rPr>
-              <a:t>https://www.salaryexpert.com/salary/job/cyber-security-analyst/egypt#:~:text=202.98%20%D8%AC.%D9%85.%E2%80%8F%20(,%E2%80%8F</a:t>
+              <a:t>Threats without borders</a:t>
             </a:r>
             <a:r>
               <a:rPr lang="en-US" dirty="0"/>
-              <a:t>.</a:t>
+              <a:t> (weekly)</a:t>
             </a:r>
           </a:p>
           <a:p>
-            <a:pPr marL="342900" lvl="0" indent="-342900">
+            <a:pPr marL="285750" lvl="0" indent="-285750">
               <a:buSzPts val="1100"/>
-              <a:buAutoNum type="arabicPeriod"/>
+              <a:buFontTx/>
+              <a:buChar char="-"/>
+            </a:pPr>
+            <a:endParaRPr lang="en-US" dirty="0"/>
+          </a:p>
+          <a:p>
+            <a:pPr marL="285750" lvl="0" indent="-285750">
+              <a:buSzPts val="1100"/>
+              <a:buFontTx/>
+              <a:buChar char="-"/>
             </a:pPr>
             <a:r>
+              <a:rPr lang="en-US" dirty="0">
+                <a:hlinkClick r:id="rId6"/>
+              </a:rPr>
+              <a:t>TDLR infosec</a:t>
+            </a:r>
+            <a:r>
               <a:rPr lang="en-US" dirty="0"/>
-              <a:t>https://www.indeed.com/career/cybersecurity-analyst/salaries</a:t>
+              <a:t> (daily)</a:t>
             </a:r>
           </a:p>
           <a:p>
-            <a:pPr marL="342900" lvl="0" indent="-342900">
+            <a:pPr marL="285750" lvl="0" indent="-285750">
               <a:buSzPts val="1100"/>
-              <a:buAutoNum type="arabicPeriod"/>
+              <a:buFontTx/>
+              <a:buChar char="-"/>
             </a:pPr>
             <a:endParaRPr lang="en-US" dirty="0"/>
           </a:p>
           <a:p>
-            <a:pPr marL="342900" lvl="0" indent="-342900">
+            <a:pPr marL="285750" lvl="0" indent="-285750">
               <a:buSzPts val="1100"/>
-              <a:buAutoNum type="arabicPeriod"/>
+              <a:buFontTx/>
+              <a:buChar char="-"/>
+            </a:pPr>
+            <a:r>
+              <a:rPr lang="en-US" dirty="0">
+                <a:hlinkClick r:id="rId7"/>
+              </a:rPr>
+              <a:t>Vulnerable U</a:t>
+            </a:r>
+            <a:r>
+              <a:rPr lang="en-US" dirty="0"/>
+              <a:t> (weekly)</a:t>
+            </a:r>
+          </a:p>
+          <a:p>
+            <a:pPr marL="285750" lvl="0" indent="-285750">
+              <a:buSzPts val="1100"/>
+              <a:buFontTx/>
+              <a:buChar char="-"/>
             </a:pPr>
             <a:endParaRPr lang="en-US" dirty="0"/>
           </a:p>
           <a:p>
-            <a:pPr marL="0" lvl="0" indent="0">
+            <a:pPr marL="285750" lvl="0" indent="-285750">
               <a:buSzPts val="1100"/>
-              <a:buNone/>
+              <a:buFontTx/>
+              <a:buChar char="-"/>
             </a:pPr>
+            <a:r>
+              <a:rPr lang="en-US" dirty="0">
+                <a:hlinkClick r:id="rId8"/>
+              </a:rPr>
+              <a:t>API security</a:t>
+            </a:r>
+            <a:r>
+              <a:rPr lang="en-US" dirty="0"/>
+              <a:t> (bi-weekly)</a:t>
+            </a:r>
+          </a:p>
+          <a:p>
+            <a:pPr marL="285750" lvl="0" indent="-285750">
+              <a:buSzPts val="1100"/>
+              <a:buFontTx/>
+              <a:buChar char="-"/>
+            </a:pPr>
+            <a:endParaRPr lang="en-US" dirty="0"/>
+          </a:p>
+          <a:p>
+            <a:pPr marL="285750" lvl="0" indent="-285750">
+              <a:buSzPts val="1100"/>
+              <a:buFontTx/>
+              <a:buChar char="-"/>
+            </a:pPr>
+            <a:r>
+              <a:rPr lang="en-US" dirty="0">
+                <a:hlinkClick r:id="rId9"/>
+              </a:rPr>
+              <a:t>Blockchain threat </a:t>
+            </a:r>
+            <a:r>
+              <a:rPr lang="en-US" dirty="0" err="1">
+                <a:hlinkClick r:id="rId9"/>
+              </a:rPr>
+              <a:t>intellegince</a:t>
+            </a:r>
+            <a:r>
+              <a:rPr lang="en-US" dirty="0"/>
+              <a:t> (weekly)</a:t>
+            </a:r>
             <a:endParaRPr dirty="0"/>
           </a:p>
         </p:txBody>
@@ -11440,6 +12094,81 @@
           </a:ln>
         </p:spPr>
       </p:cxnSp>
+      <p:sp>
+        <p:nvSpPr>
+          <p:cNvPr id="2" name="AutoShape 2">
+            <a:extLst>
+              <a:ext uri="{FF2B5EF4-FFF2-40B4-BE49-F238E27FC236}">
+                <a16:creationId xmlns:a16="http://schemas.microsoft.com/office/drawing/2014/main" id="{51807F65-ECDE-48E3-0E8B-C4FBF0C38414}"/>
+              </a:ext>
+            </a:extLst>
+          </p:cNvPr>
+          <p:cNvSpPr>
+            <a:spLocks noChangeAspect="1" noChangeArrowheads="1"/>
+          </p:cNvSpPr>
+          <p:nvPr/>
+        </p:nvSpPr>
+        <p:spPr bwMode="auto">
+          <a:xfrm>
+            <a:off x="6674662" y="1966304"/>
+            <a:ext cx="1558984" cy="1558984"/>
+          </a:xfrm>
+          <a:prstGeom prst="rect">
+            <a:avLst/>
+          </a:prstGeom>
+          <a:noFill/>
+          <a:extLst>
+            <a:ext uri="{909E8E84-426E-40DD-AFC4-6F175D3DCCD1}">
+              <a14:hiddenFill xmlns:a14="http://schemas.microsoft.com/office/drawing/2010/main">
+                <a:solidFill>
+                  <a:srgbClr val="FFFFFF"/>
+                </a:solidFill>
+              </a14:hiddenFill>
+            </a:ext>
+          </a:extLst>
+        </p:spPr>
+        <p:txBody>
+          <a:bodyPr vert="horz" wrap="square" lIns="91440" tIns="45720" rIns="91440" bIns="45720" numCol="1" anchor="t" anchorCtr="0" compatLnSpc="1">
+            <a:prstTxWarp prst="textNoShape">
+              <a:avLst/>
+            </a:prstTxWarp>
+          </a:bodyPr>
+          <a:lstStyle/>
+          <a:p>
+            <a:endParaRPr lang="en-US"/>
+          </a:p>
+        </p:txBody>
+      </p:sp>
+      <p:pic>
+        <p:nvPicPr>
+          <p:cNvPr id="5" name="Picture 4">
+            <a:extLst>
+              <a:ext uri="{FF2B5EF4-FFF2-40B4-BE49-F238E27FC236}">
+                <a16:creationId xmlns:a16="http://schemas.microsoft.com/office/drawing/2014/main" id="{96B1E1FE-F183-1623-CED6-64FE6ACB7D0A}"/>
+              </a:ext>
+            </a:extLst>
+          </p:cNvPr>
+          <p:cNvPicPr>
+            <a:picLocks noChangeAspect="1"/>
+          </p:cNvPicPr>
+          <p:nvPr/>
+        </p:nvPicPr>
+        <p:blipFill>
+          <a:blip r:embed="rId10"/>
+          <a:stretch>
+            <a:fillRect/>
+          </a:stretch>
+        </p:blipFill>
+        <p:spPr>
+          <a:xfrm>
+            <a:off x="5403468" y="1533138"/>
+            <a:ext cx="2242200" cy="2242200"/>
+          </a:xfrm>
+          <a:prstGeom prst="rect">
+            <a:avLst/>
+          </a:prstGeom>
+        </p:spPr>
+      </p:pic>
     </p:spTree>
     <p:extLst>
       <p:ext uri="{BB962C8B-B14F-4D97-AF65-F5344CB8AC3E}">
@@ -11454,6 +12183,1011 @@
 </file>
 
 <file path=ppt/slides/slide16.xml><?xml version="1.0" encoding="utf-8"?>
+<p:sld xmlns:a="http://schemas.openxmlformats.org/drawingml/2006/main" xmlns:r="http://schemas.openxmlformats.org/officeDocument/2006/relationships" xmlns:p="http://schemas.openxmlformats.org/presentationml/2006/main">
+  <p:cSld>
+    <p:spTree>
+      <p:nvGrpSpPr>
+        <p:cNvPr id="1" name="Shape 400">
+          <a:extLst>
+            <a:ext uri="{FF2B5EF4-FFF2-40B4-BE49-F238E27FC236}">
+              <a16:creationId xmlns:a16="http://schemas.microsoft.com/office/drawing/2014/main" id="{D2FB3BF7-1326-A6B7-E9D2-B6A31FCB24AC}"/>
+            </a:ext>
+          </a:extLst>
+        </p:cNvPr>
+        <p:cNvGrpSpPr/>
+        <p:nvPr/>
+      </p:nvGrpSpPr>
+      <p:grpSpPr>
+        <a:xfrm>
+          <a:off x="0" y="0"/>
+          <a:ext cx="0" cy="0"/>
+          <a:chOff x="0" y="0"/>
+          <a:chExt cx="0" cy="0"/>
+        </a:xfrm>
+      </p:grpSpPr>
+      <p:sp>
+        <p:nvSpPr>
+          <p:cNvPr id="401" name="Google Shape;401;p54">
+            <a:extLst>
+              <a:ext uri="{FF2B5EF4-FFF2-40B4-BE49-F238E27FC236}">
+                <a16:creationId xmlns:a16="http://schemas.microsoft.com/office/drawing/2014/main" id="{8A5BA87D-DD2B-6573-DB0D-3ECB3D1A0785}"/>
+              </a:ext>
+            </a:extLst>
+          </p:cNvPr>
+          <p:cNvSpPr txBox="1">
+            <a:spLocks noGrp="1"/>
+          </p:cNvSpPr>
+          <p:nvPr>
+            <p:ph type="title"/>
+          </p:nvPr>
+        </p:nvSpPr>
+        <p:spPr>
+          <a:xfrm>
+            <a:off x="713225" y="539500"/>
+            <a:ext cx="7717500" cy="612900"/>
+          </a:xfrm>
+          <a:prstGeom prst="rect">
+            <a:avLst/>
+          </a:prstGeom>
+        </p:spPr>
+        <p:txBody>
+          <a:bodyPr spcFirstLastPara="1" wrap="square" lIns="91425" tIns="91425" rIns="91425" bIns="91425" anchor="t" anchorCtr="0">
+            <a:noAutofit/>
+          </a:bodyPr>
+          <a:lstStyle/>
+          <a:p>
+            <a:pPr marL="0" lvl="0" indent="0" algn="l" rtl="0">
+              <a:spcBef>
+                <a:spcPts val="0"/>
+              </a:spcBef>
+              <a:spcAft>
+                <a:spcPts val="0"/>
+              </a:spcAft>
+              <a:buNone/>
+            </a:pPr>
+            <a:r>
+              <a:rPr lang="en" dirty="0"/>
+              <a:t>Certifications</a:t>
+            </a:r>
+            <a:endParaRPr dirty="0"/>
+          </a:p>
+        </p:txBody>
+      </p:sp>
+      <p:cxnSp>
+        <p:nvCxnSpPr>
+          <p:cNvPr id="403" name="Google Shape;403;p54">
+            <a:extLst>
+              <a:ext uri="{FF2B5EF4-FFF2-40B4-BE49-F238E27FC236}">
+                <a16:creationId xmlns:a16="http://schemas.microsoft.com/office/drawing/2014/main" id="{FCC44FD7-46D9-C004-6229-D10999BD5BCD}"/>
+              </a:ext>
+            </a:extLst>
+          </p:cNvPr>
+          <p:cNvCxnSpPr/>
+          <p:nvPr/>
+        </p:nvCxnSpPr>
+        <p:spPr>
+          <a:xfrm>
+            <a:off x="-19500" y="1152025"/>
+            <a:ext cx="9183000" cy="0"/>
+          </a:xfrm>
+          <a:prstGeom prst="straightConnector1">
+            <a:avLst/>
+          </a:prstGeom>
+          <a:noFill/>
+          <a:ln w="9525" cap="flat" cmpd="sng">
+            <a:solidFill>
+              <a:schemeClr val="dk1"/>
+            </a:solidFill>
+            <a:prstDash val="solid"/>
+            <a:round/>
+            <a:headEnd type="none" w="med" len="med"/>
+            <a:tailEnd type="none" w="med" len="med"/>
+          </a:ln>
+        </p:spPr>
+      </p:cxnSp>
+      <p:sp>
+        <p:nvSpPr>
+          <p:cNvPr id="2" name="AutoShape 2">
+            <a:extLst>
+              <a:ext uri="{FF2B5EF4-FFF2-40B4-BE49-F238E27FC236}">
+                <a16:creationId xmlns:a16="http://schemas.microsoft.com/office/drawing/2014/main" id="{4A0A5D2F-97D2-C8FC-0E9C-7CA10F79FDD4}"/>
+              </a:ext>
+            </a:extLst>
+          </p:cNvPr>
+          <p:cNvSpPr>
+            <a:spLocks noChangeAspect="1" noChangeArrowheads="1"/>
+          </p:cNvSpPr>
+          <p:nvPr/>
+        </p:nvSpPr>
+        <p:spPr bwMode="auto">
+          <a:xfrm>
+            <a:off x="6674662" y="1966304"/>
+            <a:ext cx="1558984" cy="1558984"/>
+          </a:xfrm>
+          <a:prstGeom prst="rect">
+            <a:avLst/>
+          </a:prstGeom>
+          <a:noFill/>
+          <a:extLst>
+            <a:ext uri="{909E8E84-426E-40DD-AFC4-6F175D3DCCD1}">
+              <a14:hiddenFill xmlns:a14="http://schemas.microsoft.com/office/drawing/2010/main">
+                <a:solidFill>
+                  <a:srgbClr val="FFFFFF"/>
+                </a:solidFill>
+              </a14:hiddenFill>
+            </a:ext>
+          </a:extLst>
+        </p:spPr>
+        <p:txBody>
+          <a:bodyPr vert="horz" wrap="square" lIns="91440" tIns="45720" rIns="91440" bIns="45720" numCol="1" anchor="t" anchorCtr="0" compatLnSpc="1">
+            <a:prstTxWarp prst="textNoShape">
+              <a:avLst/>
+            </a:prstTxWarp>
+          </a:bodyPr>
+          <a:lstStyle/>
+          <a:p>
+            <a:endParaRPr lang="en-US"/>
+          </a:p>
+        </p:txBody>
+      </p:sp>
+      <p:pic>
+        <p:nvPicPr>
+          <p:cNvPr id="4" name="Picture 3">
+            <a:hlinkClick r:id="rId3"/>
+            <a:extLst>
+              <a:ext uri="{FF2B5EF4-FFF2-40B4-BE49-F238E27FC236}">
+                <a16:creationId xmlns:a16="http://schemas.microsoft.com/office/drawing/2014/main" id="{D2FAD938-8791-C7B8-D442-845B3300BFAF}"/>
+              </a:ext>
+            </a:extLst>
+          </p:cNvPr>
+          <p:cNvPicPr>
+            <a:picLocks noChangeAspect="1"/>
+          </p:cNvPicPr>
+          <p:nvPr/>
+        </p:nvPicPr>
+        <p:blipFill>
+          <a:blip r:embed="rId4"/>
+          <a:stretch>
+            <a:fillRect/>
+          </a:stretch>
+        </p:blipFill>
+        <p:spPr>
+          <a:xfrm>
+            <a:off x="1034691" y="1266328"/>
+            <a:ext cx="7074568" cy="3598818"/>
+          </a:xfrm>
+          <a:prstGeom prst="rect">
+            <a:avLst/>
+          </a:prstGeom>
+        </p:spPr>
+      </p:pic>
+    </p:spTree>
+    <p:extLst>
+      <p:ext uri="{BB962C8B-B14F-4D97-AF65-F5344CB8AC3E}">
+        <p14:creationId xmlns:p14="http://schemas.microsoft.com/office/powerpoint/2010/main" val="2493876317"/>
+      </p:ext>
+    </p:extLst>
+  </p:cSld>
+  <p:clrMapOvr>
+    <a:masterClrMapping/>
+  </p:clrMapOvr>
+</p:sld>
+</file>
+
+<file path=ppt/slides/slide17.xml><?xml version="1.0" encoding="utf-8"?>
+<p:sld xmlns:a="http://schemas.openxmlformats.org/drawingml/2006/main" xmlns:r="http://schemas.openxmlformats.org/officeDocument/2006/relationships" xmlns:p="http://schemas.openxmlformats.org/presentationml/2006/main">
+  <p:cSld>
+    <p:spTree>
+      <p:nvGrpSpPr>
+        <p:cNvPr id="1" name="Shape 400">
+          <a:extLst>
+            <a:ext uri="{FF2B5EF4-FFF2-40B4-BE49-F238E27FC236}">
+              <a16:creationId xmlns:a16="http://schemas.microsoft.com/office/drawing/2014/main" id="{EFA24228-DBBE-ECE9-55AB-5040898832D2}"/>
+            </a:ext>
+          </a:extLst>
+        </p:cNvPr>
+        <p:cNvGrpSpPr/>
+        <p:nvPr/>
+      </p:nvGrpSpPr>
+      <p:grpSpPr>
+        <a:xfrm>
+          <a:off x="0" y="0"/>
+          <a:ext cx="0" cy="0"/>
+          <a:chOff x="0" y="0"/>
+          <a:chExt cx="0" cy="0"/>
+        </a:xfrm>
+      </p:grpSpPr>
+      <p:sp>
+        <p:nvSpPr>
+          <p:cNvPr id="401" name="Google Shape;401;p54">
+            <a:extLst>
+              <a:ext uri="{FF2B5EF4-FFF2-40B4-BE49-F238E27FC236}">
+                <a16:creationId xmlns:a16="http://schemas.microsoft.com/office/drawing/2014/main" id="{E6CACDB3-7FB9-E344-DB2C-0E49B92B1671}"/>
+              </a:ext>
+            </a:extLst>
+          </p:cNvPr>
+          <p:cNvSpPr txBox="1">
+            <a:spLocks noGrp="1"/>
+          </p:cNvSpPr>
+          <p:nvPr>
+            <p:ph type="title"/>
+          </p:nvPr>
+        </p:nvSpPr>
+        <p:spPr>
+          <a:prstGeom prst="rect">
+            <a:avLst/>
+          </a:prstGeom>
+        </p:spPr>
+        <p:txBody>
+          <a:bodyPr spcFirstLastPara="1" wrap="square" lIns="91425" tIns="91425" rIns="91425" bIns="91425" anchor="t" anchorCtr="0">
+            <a:noAutofit/>
+          </a:bodyPr>
+          <a:lstStyle/>
+          <a:p>
+            <a:pPr marL="0" lvl="0" indent="0" algn="l" rtl="0">
+              <a:spcBef>
+                <a:spcPts val="0"/>
+              </a:spcBef>
+              <a:spcAft>
+                <a:spcPts val="0"/>
+              </a:spcAft>
+              <a:buNone/>
+            </a:pPr>
+            <a:r>
+              <a:rPr lang="en" dirty="0"/>
+              <a:t>Certifications self study</a:t>
+            </a:r>
+            <a:endParaRPr dirty="0"/>
+          </a:p>
+        </p:txBody>
+      </p:sp>
+      <p:sp>
+        <p:nvSpPr>
+          <p:cNvPr id="3" name="Text Placeholder 2">
+            <a:extLst>
+              <a:ext uri="{FF2B5EF4-FFF2-40B4-BE49-F238E27FC236}">
+                <a16:creationId xmlns:a16="http://schemas.microsoft.com/office/drawing/2014/main" id="{BC7797ED-A9FC-217E-F4BF-1FFD1F574591}"/>
+              </a:ext>
+            </a:extLst>
+          </p:cNvPr>
+          <p:cNvSpPr>
+            <a:spLocks noGrp="1"/>
+          </p:cNvSpPr>
+          <p:nvPr>
+            <p:ph type="body" idx="1"/>
+          </p:nvPr>
+        </p:nvSpPr>
+        <p:spPr>
+          <a:xfrm>
+            <a:off x="252275" y="1764551"/>
+            <a:ext cx="4319700" cy="2242200"/>
+          </a:xfrm>
+        </p:spPr>
+        <p:txBody>
+          <a:bodyPr/>
+          <a:lstStyle/>
+          <a:p>
+            <a:r>
+              <a:rPr lang="en-US" dirty="0">
+                <a:hlinkClick r:id="rId3"/>
+              </a:rPr>
+              <a:t>ISC2</a:t>
+            </a:r>
+            <a:r>
+              <a:rPr lang="en-US" dirty="0"/>
+              <a:t> (ISC2 Certs)</a:t>
+            </a:r>
+          </a:p>
+          <a:p>
+            <a:endParaRPr lang="en-US" dirty="0"/>
+          </a:p>
+          <a:p>
+            <a:r>
+              <a:rPr lang="en-US" dirty="0">
+                <a:hlinkClick r:id="rId4"/>
+              </a:rPr>
+              <a:t>Cybrary</a:t>
+            </a:r>
+            <a:r>
+              <a:rPr lang="en-US" dirty="0"/>
+              <a:t> (COMPTIA, Cisco CCNA, Certified ethical hacker)</a:t>
+            </a:r>
+          </a:p>
+          <a:p>
+            <a:endParaRPr lang="en-US" dirty="0"/>
+          </a:p>
+          <a:p>
+            <a:r>
+              <a:rPr lang="en-US" dirty="0">
+                <a:hlinkClick r:id="rId5"/>
+              </a:rPr>
+              <a:t>Exam topic </a:t>
+            </a:r>
+            <a:r>
+              <a:rPr lang="en-US" dirty="0"/>
+              <a:t>(more than 170 cert providers)</a:t>
+            </a:r>
+          </a:p>
+          <a:p>
+            <a:endParaRPr lang="en-US" dirty="0"/>
+          </a:p>
+          <a:p>
+            <a:endParaRPr lang="en-US" dirty="0"/>
+          </a:p>
+          <a:p>
+            <a:endParaRPr lang="en-US" dirty="0"/>
+          </a:p>
+        </p:txBody>
+      </p:sp>
+      <p:cxnSp>
+        <p:nvCxnSpPr>
+          <p:cNvPr id="403" name="Google Shape;403;p54">
+            <a:extLst>
+              <a:ext uri="{FF2B5EF4-FFF2-40B4-BE49-F238E27FC236}">
+                <a16:creationId xmlns:a16="http://schemas.microsoft.com/office/drawing/2014/main" id="{7537BA89-1E10-59FF-AF32-486CF05998EF}"/>
+              </a:ext>
+            </a:extLst>
+          </p:cNvPr>
+          <p:cNvCxnSpPr/>
+          <p:nvPr/>
+        </p:nvCxnSpPr>
+        <p:spPr>
+          <a:xfrm>
+            <a:off x="-19500" y="1152025"/>
+            <a:ext cx="9183000" cy="0"/>
+          </a:xfrm>
+          <a:prstGeom prst="straightConnector1">
+            <a:avLst/>
+          </a:prstGeom>
+          <a:noFill/>
+          <a:ln w="9525" cap="flat" cmpd="sng">
+            <a:solidFill>
+              <a:schemeClr val="dk1"/>
+            </a:solidFill>
+            <a:prstDash val="solid"/>
+            <a:round/>
+            <a:headEnd type="none" w="med" len="med"/>
+            <a:tailEnd type="none" w="med" len="med"/>
+          </a:ln>
+        </p:spPr>
+      </p:cxnSp>
+      <p:sp>
+        <p:nvSpPr>
+          <p:cNvPr id="2" name="AutoShape 2">
+            <a:extLst>
+              <a:ext uri="{FF2B5EF4-FFF2-40B4-BE49-F238E27FC236}">
+                <a16:creationId xmlns:a16="http://schemas.microsoft.com/office/drawing/2014/main" id="{73F3F550-59C1-A5F6-F27D-E7B05474C31E}"/>
+              </a:ext>
+            </a:extLst>
+          </p:cNvPr>
+          <p:cNvSpPr>
+            <a:spLocks noChangeAspect="1" noChangeArrowheads="1"/>
+          </p:cNvSpPr>
+          <p:nvPr/>
+        </p:nvSpPr>
+        <p:spPr bwMode="auto">
+          <a:xfrm>
+            <a:off x="6674662" y="1966304"/>
+            <a:ext cx="1558984" cy="1558984"/>
+          </a:xfrm>
+          <a:prstGeom prst="rect">
+            <a:avLst/>
+          </a:prstGeom>
+          <a:noFill/>
+          <a:extLst>
+            <a:ext uri="{909E8E84-426E-40DD-AFC4-6F175D3DCCD1}">
+              <a14:hiddenFill xmlns:a14="http://schemas.microsoft.com/office/drawing/2010/main">
+                <a:solidFill>
+                  <a:srgbClr val="FFFFFF"/>
+                </a:solidFill>
+              </a14:hiddenFill>
+            </a:ext>
+          </a:extLst>
+        </p:spPr>
+        <p:txBody>
+          <a:bodyPr vert="horz" wrap="square" lIns="91440" tIns="45720" rIns="91440" bIns="45720" numCol="1" anchor="t" anchorCtr="0" compatLnSpc="1">
+            <a:prstTxWarp prst="textNoShape">
+              <a:avLst/>
+            </a:prstTxWarp>
+          </a:bodyPr>
+          <a:lstStyle/>
+          <a:p>
+            <a:endParaRPr lang="en-US"/>
+          </a:p>
+        </p:txBody>
+      </p:sp>
+      <p:sp>
+        <p:nvSpPr>
+          <p:cNvPr id="5" name="Text Placeholder 2">
+            <a:extLst>
+              <a:ext uri="{FF2B5EF4-FFF2-40B4-BE49-F238E27FC236}">
+                <a16:creationId xmlns:a16="http://schemas.microsoft.com/office/drawing/2014/main" id="{FCC678AE-E384-2BDA-1421-82C6AE962F57}"/>
+              </a:ext>
+            </a:extLst>
+          </p:cNvPr>
+          <p:cNvSpPr txBox="1">
+            <a:spLocks/>
+          </p:cNvSpPr>
+          <p:nvPr/>
+        </p:nvSpPr>
+        <p:spPr>
+          <a:xfrm>
+            <a:off x="4571975" y="1764551"/>
+            <a:ext cx="4319700" cy="2242200"/>
+          </a:xfrm>
+          <a:prstGeom prst="rect">
+            <a:avLst/>
+          </a:prstGeom>
+          <a:noFill/>
+          <a:ln>
+            <a:noFill/>
+          </a:ln>
+        </p:spPr>
+        <p:txBody>
+          <a:bodyPr spcFirstLastPara="1" wrap="square" lIns="91425" tIns="91425" rIns="91425" bIns="91425" anchor="t" anchorCtr="0">
+            <a:noAutofit/>
+          </a:bodyPr>
+          <a:lstStyle>
+            <a:defPPr marR="0" lvl="0" algn="l" rtl="0">
+              <a:lnSpc>
+                <a:spcPct val="100000"/>
+              </a:lnSpc>
+              <a:spcBef>
+                <a:spcPts val="0"/>
+              </a:spcBef>
+              <a:spcAft>
+                <a:spcPts val="0"/>
+              </a:spcAft>
+            </a:defPPr>
+            <a:lvl1pPr marL="457200" marR="0" lvl="0" indent="-317500" algn="l" rtl="0">
+              <a:lnSpc>
+                <a:spcPct val="100000"/>
+              </a:lnSpc>
+              <a:spcBef>
+                <a:spcPts val="0"/>
+              </a:spcBef>
+              <a:spcAft>
+                <a:spcPts val="0"/>
+              </a:spcAft>
+              <a:buClr>
+                <a:schemeClr val="dk1"/>
+              </a:buClr>
+              <a:buSzPts val="1400"/>
+              <a:buFont typeface="Prompt"/>
+              <a:buChar char="■"/>
+              <a:defRPr sz="1400" b="0" i="0" u="none" strike="noStrike" cap="none">
+                <a:solidFill>
+                  <a:schemeClr val="dk1"/>
+                </a:solidFill>
+                <a:latin typeface="Roboto Condensed"/>
+                <a:ea typeface="Roboto Condensed"/>
+                <a:cs typeface="Roboto Condensed"/>
+                <a:sym typeface="Roboto Condensed"/>
+              </a:defRPr>
+            </a:lvl1pPr>
+            <a:lvl2pPr marL="914400" marR="0" lvl="1" indent="-317500" algn="l" rtl="0">
+              <a:lnSpc>
+                <a:spcPct val="100000"/>
+              </a:lnSpc>
+              <a:spcBef>
+                <a:spcPts val="0"/>
+              </a:spcBef>
+              <a:spcAft>
+                <a:spcPts val="0"/>
+              </a:spcAft>
+              <a:buClr>
+                <a:schemeClr val="dk1"/>
+              </a:buClr>
+              <a:buSzPts val="1400"/>
+              <a:buFont typeface="Prompt"/>
+              <a:buChar char="○"/>
+              <a:defRPr sz="1400" b="0" i="0" u="none" strike="noStrike" cap="none">
+                <a:solidFill>
+                  <a:schemeClr val="dk1"/>
+                </a:solidFill>
+                <a:latin typeface="Roboto Condensed"/>
+                <a:ea typeface="Roboto Condensed"/>
+                <a:cs typeface="Roboto Condensed"/>
+                <a:sym typeface="Roboto Condensed"/>
+              </a:defRPr>
+            </a:lvl2pPr>
+            <a:lvl3pPr marL="1371600" marR="0" lvl="2" indent="-317500" algn="l" rtl="0">
+              <a:lnSpc>
+                <a:spcPct val="100000"/>
+              </a:lnSpc>
+              <a:spcBef>
+                <a:spcPts val="0"/>
+              </a:spcBef>
+              <a:spcAft>
+                <a:spcPts val="0"/>
+              </a:spcAft>
+              <a:buClr>
+                <a:schemeClr val="dk1"/>
+              </a:buClr>
+              <a:buSzPts val="1400"/>
+              <a:buFont typeface="Prompt"/>
+              <a:buChar char="■"/>
+              <a:defRPr sz="1400" b="0" i="0" u="none" strike="noStrike" cap="none">
+                <a:solidFill>
+                  <a:schemeClr val="dk1"/>
+                </a:solidFill>
+                <a:latin typeface="Roboto Condensed"/>
+                <a:ea typeface="Roboto Condensed"/>
+                <a:cs typeface="Roboto Condensed"/>
+                <a:sym typeface="Roboto Condensed"/>
+              </a:defRPr>
+            </a:lvl3pPr>
+            <a:lvl4pPr marL="1828800" marR="0" lvl="3" indent="-317500" algn="l" rtl="0">
+              <a:lnSpc>
+                <a:spcPct val="100000"/>
+              </a:lnSpc>
+              <a:spcBef>
+                <a:spcPts val="0"/>
+              </a:spcBef>
+              <a:spcAft>
+                <a:spcPts val="0"/>
+              </a:spcAft>
+              <a:buClr>
+                <a:schemeClr val="dk1"/>
+              </a:buClr>
+              <a:buSzPts val="1400"/>
+              <a:buFont typeface="Prompt"/>
+              <a:buChar char="●"/>
+              <a:defRPr sz="1400" b="0" i="0" u="none" strike="noStrike" cap="none">
+                <a:solidFill>
+                  <a:schemeClr val="dk1"/>
+                </a:solidFill>
+                <a:latin typeface="Roboto Condensed"/>
+                <a:ea typeface="Roboto Condensed"/>
+                <a:cs typeface="Roboto Condensed"/>
+                <a:sym typeface="Roboto Condensed"/>
+              </a:defRPr>
+            </a:lvl4pPr>
+            <a:lvl5pPr marL="2286000" marR="0" lvl="4" indent="-317500" algn="l" rtl="0">
+              <a:lnSpc>
+                <a:spcPct val="100000"/>
+              </a:lnSpc>
+              <a:spcBef>
+                <a:spcPts val="0"/>
+              </a:spcBef>
+              <a:spcAft>
+                <a:spcPts val="0"/>
+              </a:spcAft>
+              <a:buClr>
+                <a:schemeClr val="dk1"/>
+              </a:buClr>
+              <a:buSzPts val="1400"/>
+              <a:buFont typeface="Prompt"/>
+              <a:buChar char="○"/>
+              <a:defRPr sz="1400" b="0" i="0" u="none" strike="noStrike" cap="none">
+                <a:solidFill>
+                  <a:schemeClr val="dk1"/>
+                </a:solidFill>
+                <a:latin typeface="Roboto Condensed"/>
+                <a:ea typeface="Roboto Condensed"/>
+                <a:cs typeface="Roboto Condensed"/>
+                <a:sym typeface="Roboto Condensed"/>
+              </a:defRPr>
+            </a:lvl5pPr>
+            <a:lvl6pPr marL="2743200" marR="0" lvl="5" indent="-317500" algn="l" rtl="0">
+              <a:lnSpc>
+                <a:spcPct val="100000"/>
+              </a:lnSpc>
+              <a:spcBef>
+                <a:spcPts val="0"/>
+              </a:spcBef>
+              <a:spcAft>
+                <a:spcPts val="0"/>
+              </a:spcAft>
+              <a:buClr>
+                <a:schemeClr val="dk1"/>
+              </a:buClr>
+              <a:buSzPts val="1400"/>
+              <a:buFont typeface="Prompt"/>
+              <a:buChar char="■"/>
+              <a:defRPr sz="1400" b="0" i="0" u="none" strike="noStrike" cap="none">
+                <a:solidFill>
+                  <a:schemeClr val="dk1"/>
+                </a:solidFill>
+                <a:latin typeface="Roboto Condensed"/>
+                <a:ea typeface="Roboto Condensed"/>
+                <a:cs typeface="Roboto Condensed"/>
+                <a:sym typeface="Roboto Condensed"/>
+              </a:defRPr>
+            </a:lvl6pPr>
+            <a:lvl7pPr marL="3200400" marR="0" lvl="6" indent="-317500" algn="l" rtl="0">
+              <a:lnSpc>
+                <a:spcPct val="100000"/>
+              </a:lnSpc>
+              <a:spcBef>
+                <a:spcPts val="0"/>
+              </a:spcBef>
+              <a:spcAft>
+                <a:spcPts val="0"/>
+              </a:spcAft>
+              <a:buClr>
+                <a:schemeClr val="dk1"/>
+              </a:buClr>
+              <a:buSzPts val="1400"/>
+              <a:buFont typeface="Prompt"/>
+              <a:buChar char="●"/>
+              <a:defRPr sz="1400" b="0" i="0" u="none" strike="noStrike" cap="none">
+                <a:solidFill>
+                  <a:schemeClr val="dk1"/>
+                </a:solidFill>
+                <a:latin typeface="Roboto Condensed"/>
+                <a:ea typeface="Roboto Condensed"/>
+                <a:cs typeface="Roboto Condensed"/>
+                <a:sym typeface="Roboto Condensed"/>
+              </a:defRPr>
+            </a:lvl7pPr>
+            <a:lvl8pPr marL="3657600" marR="0" lvl="7" indent="-317500" algn="l" rtl="0">
+              <a:lnSpc>
+                <a:spcPct val="100000"/>
+              </a:lnSpc>
+              <a:spcBef>
+                <a:spcPts val="0"/>
+              </a:spcBef>
+              <a:spcAft>
+                <a:spcPts val="0"/>
+              </a:spcAft>
+              <a:buClr>
+                <a:schemeClr val="dk1"/>
+              </a:buClr>
+              <a:buSzPts val="1400"/>
+              <a:buFont typeface="Prompt"/>
+              <a:buChar char="○"/>
+              <a:defRPr sz="1400" b="0" i="0" u="none" strike="noStrike" cap="none">
+                <a:solidFill>
+                  <a:schemeClr val="dk1"/>
+                </a:solidFill>
+                <a:latin typeface="Roboto Condensed"/>
+                <a:ea typeface="Roboto Condensed"/>
+                <a:cs typeface="Roboto Condensed"/>
+                <a:sym typeface="Roboto Condensed"/>
+              </a:defRPr>
+            </a:lvl8pPr>
+            <a:lvl9pPr marL="4114800" marR="0" lvl="8" indent="-317500" algn="l" rtl="0">
+              <a:lnSpc>
+                <a:spcPct val="100000"/>
+              </a:lnSpc>
+              <a:spcBef>
+                <a:spcPts val="0"/>
+              </a:spcBef>
+              <a:spcAft>
+                <a:spcPts val="0"/>
+              </a:spcAft>
+              <a:buClr>
+                <a:schemeClr val="dk1"/>
+              </a:buClr>
+              <a:buSzPts val="1400"/>
+              <a:buFont typeface="Prompt"/>
+              <a:buChar char="■"/>
+              <a:defRPr sz="1400" b="0" i="0" u="none" strike="noStrike" cap="none">
+                <a:solidFill>
+                  <a:schemeClr val="dk1"/>
+                </a:solidFill>
+                <a:latin typeface="Roboto Condensed"/>
+                <a:ea typeface="Roboto Condensed"/>
+                <a:cs typeface="Roboto Condensed"/>
+                <a:sym typeface="Roboto Condensed"/>
+              </a:defRPr>
+            </a:lvl9pPr>
+          </a:lstStyle>
+          <a:p>
+            <a:r>
+              <a:rPr lang="en-US" dirty="0">
+                <a:hlinkClick r:id="rId6"/>
+              </a:rPr>
+              <a:t>Cybersecurity </a:t>
+            </a:r>
+            <a:r>
+              <a:rPr lang="en-US" dirty="0" err="1">
+                <a:hlinkClick r:id="rId6"/>
+              </a:rPr>
+              <a:t>youtube</a:t>
+            </a:r>
+            <a:r>
+              <a:rPr lang="en-US" dirty="0">
+                <a:hlinkClick r:id="rId6"/>
+              </a:rPr>
+              <a:t> playlist</a:t>
+            </a:r>
+            <a:endParaRPr lang="en-US" dirty="0"/>
+          </a:p>
+          <a:p>
+            <a:endParaRPr lang="en-US" dirty="0"/>
+          </a:p>
+          <a:p>
+            <a:r>
+              <a:rPr lang="en-US" dirty="0">
+                <a:hlinkClick r:id="rId7"/>
+              </a:rPr>
+              <a:t>ISC2 by secure the humans</a:t>
+            </a:r>
+            <a:endParaRPr lang="en-US" dirty="0"/>
+          </a:p>
+          <a:p>
+            <a:endParaRPr lang="en-US" dirty="0"/>
+          </a:p>
+          <a:p>
+            <a:r>
+              <a:rPr lang="en-US" dirty="0">
+                <a:hlinkClick r:id="rId8"/>
+              </a:rPr>
+              <a:t>CCNA by information technology</a:t>
+            </a:r>
+            <a:endParaRPr lang="en-US" dirty="0"/>
+          </a:p>
+        </p:txBody>
+      </p:sp>
+    </p:spTree>
+    <p:extLst>
+      <p:ext uri="{BB962C8B-B14F-4D97-AF65-F5344CB8AC3E}">
+        <p14:creationId xmlns:p14="http://schemas.microsoft.com/office/powerpoint/2010/main" val="451608713"/>
+      </p:ext>
+    </p:extLst>
+  </p:cSld>
+  <p:clrMapOvr>
+    <a:masterClrMapping/>
+  </p:clrMapOvr>
+</p:sld>
+</file>
+
+<file path=ppt/slides/slide18.xml><?xml version="1.0" encoding="utf-8"?>
+<p:sld xmlns:a="http://schemas.openxmlformats.org/drawingml/2006/main" xmlns:r="http://schemas.openxmlformats.org/officeDocument/2006/relationships" xmlns:p="http://schemas.openxmlformats.org/presentationml/2006/main">
+  <p:cSld>
+    <p:spTree>
+      <p:nvGrpSpPr>
+        <p:cNvPr id="1" name="Shape 400">
+          <a:extLst>
+            <a:ext uri="{FF2B5EF4-FFF2-40B4-BE49-F238E27FC236}">
+              <a16:creationId xmlns:a16="http://schemas.microsoft.com/office/drawing/2014/main" id="{19D8F0D7-B709-3329-91F6-C0CCDAFA3D4A}"/>
+            </a:ext>
+          </a:extLst>
+        </p:cNvPr>
+        <p:cNvGrpSpPr/>
+        <p:nvPr/>
+      </p:nvGrpSpPr>
+      <p:grpSpPr>
+        <a:xfrm>
+          <a:off x="0" y="0"/>
+          <a:ext cx="0" cy="0"/>
+          <a:chOff x="0" y="0"/>
+          <a:chExt cx="0" cy="0"/>
+        </a:xfrm>
+      </p:grpSpPr>
+      <p:sp>
+        <p:nvSpPr>
+          <p:cNvPr id="401" name="Google Shape;401;p54">
+            <a:extLst>
+              <a:ext uri="{FF2B5EF4-FFF2-40B4-BE49-F238E27FC236}">
+                <a16:creationId xmlns:a16="http://schemas.microsoft.com/office/drawing/2014/main" id="{A77E3CAD-F320-E00D-AA43-5843166614AC}"/>
+              </a:ext>
+            </a:extLst>
+          </p:cNvPr>
+          <p:cNvSpPr txBox="1">
+            <a:spLocks noGrp="1"/>
+          </p:cNvSpPr>
+          <p:nvPr>
+            <p:ph type="title"/>
+          </p:nvPr>
+        </p:nvSpPr>
+        <p:spPr>
+          <a:xfrm>
+            <a:off x="2979496" y="2265300"/>
+            <a:ext cx="3185007" cy="612900"/>
+          </a:xfrm>
+          <a:prstGeom prst="rect">
+            <a:avLst/>
+          </a:prstGeom>
+        </p:spPr>
+        <p:txBody>
+          <a:bodyPr spcFirstLastPara="1" wrap="square" lIns="91425" tIns="91425" rIns="91425" bIns="91425" anchor="t" anchorCtr="0">
+            <a:noAutofit/>
+          </a:bodyPr>
+          <a:lstStyle/>
+          <a:p>
+            <a:pPr marL="0" lvl="0" indent="0" algn="l" rtl="0">
+              <a:spcBef>
+                <a:spcPts val="0"/>
+              </a:spcBef>
+              <a:spcAft>
+                <a:spcPts val="0"/>
+              </a:spcAft>
+              <a:buNone/>
+            </a:pPr>
+            <a:r>
+              <a:rPr lang="en" dirty="0"/>
+              <a:t>Internships?</a:t>
+            </a:r>
+            <a:endParaRPr dirty="0"/>
+          </a:p>
+        </p:txBody>
+      </p:sp>
+      <p:cxnSp>
+        <p:nvCxnSpPr>
+          <p:cNvPr id="403" name="Google Shape;403;p54">
+            <a:extLst>
+              <a:ext uri="{FF2B5EF4-FFF2-40B4-BE49-F238E27FC236}">
+                <a16:creationId xmlns:a16="http://schemas.microsoft.com/office/drawing/2014/main" id="{8F7EA984-8BFB-DE02-2072-C97F8F0439AC}"/>
+              </a:ext>
+            </a:extLst>
+          </p:cNvPr>
+          <p:cNvCxnSpPr/>
+          <p:nvPr/>
+        </p:nvCxnSpPr>
+        <p:spPr>
+          <a:xfrm>
+            <a:off x="-19500" y="1152025"/>
+            <a:ext cx="9183000" cy="0"/>
+          </a:xfrm>
+          <a:prstGeom prst="straightConnector1">
+            <a:avLst/>
+          </a:prstGeom>
+          <a:noFill/>
+          <a:ln w="9525" cap="flat" cmpd="sng">
+            <a:solidFill>
+              <a:schemeClr val="dk1"/>
+            </a:solidFill>
+            <a:prstDash val="solid"/>
+            <a:round/>
+            <a:headEnd type="none" w="med" len="med"/>
+            <a:tailEnd type="none" w="med" len="med"/>
+          </a:ln>
+        </p:spPr>
+      </p:cxnSp>
+      <p:sp>
+        <p:nvSpPr>
+          <p:cNvPr id="2" name="AutoShape 2">
+            <a:extLst>
+              <a:ext uri="{FF2B5EF4-FFF2-40B4-BE49-F238E27FC236}">
+                <a16:creationId xmlns:a16="http://schemas.microsoft.com/office/drawing/2014/main" id="{DAD5437C-76D2-2A92-1A3E-C1644639673E}"/>
+              </a:ext>
+            </a:extLst>
+          </p:cNvPr>
+          <p:cNvSpPr>
+            <a:spLocks noChangeAspect="1" noChangeArrowheads="1"/>
+          </p:cNvSpPr>
+          <p:nvPr/>
+        </p:nvSpPr>
+        <p:spPr bwMode="auto">
+          <a:xfrm>
+            <a:off x="6674662" y="1966304"/>
+            <a:ext cx="1558984" cy="1558984"/>
+          </a:xfrm>
+          <a:prstGeom prst="rect">
+            <a:avLst/>
+          </a:prstGeom>
+          <a:noFill/>
+          <a:extLst>
+            <a:ext uri="{909E8E84-426E-40DD-AFC4-6F175D3DCCD1}">
+              <a14:hiddenFill xmlns:a14="http://schemas.microsoft.com/office/drawing/2010/main">
+                <a:solidFill>
+                  <a:srgbClr val="FFFFFF"/>
+                </a:solidFill>
+              </a14:hiddenFill>
+            </a:ext>
+          </a:extLst>
+        </p:spPr>
+        <p:txBody>
+          <a:bodyPr vert="horz" wrap="square" lIns="91440" tIns="45720" rIns="91440" bIns="45720" numCol="1" anchor="t" anchorCtr="0" compatLnSpc="1">
+            <a:prstTxWarp prst="textNoShape">
+              <a:avLst/>
+            </a:prstTxWarp>
+          </a:bodyPr>
+          <a:lstStyle/>
+          <a:p>
+            <a:endParaRPr lang="en-US"/>
+          </a:p>
+        </p:txBody>
+      </p:sp>
+      <p:sp>
+        <p:nvSpPr>
+          <p:cNvPr id="4" name="Google Shape;349;p50">
+            <a:extLst>
+              <a:ext uri="{FF2B5EF4-FFF2-40B4-BE49-F238E27FC236}">
+                <a16:creationId xmlns:a16="http://schemas.microsoft.com/office/drawing/2014/main" id="{A1324674-D900-21D3-FB31-A4A767453F2E}"/>
+              </a:ext>
+            </a:extLst>
+          </p:cNvPr>
+          <p:cNvSpPr/>
+          <p:nvPr/>
+        </p:nvSpPr>
+        <p:spPr>
+          <a:xfrm>
+            <a:off x="6263299" y="2144100"/>
+            <a:ext cx="6517800" cy="855300"/>
+          </a:xfrm>
+          <a:prstGeom prst="rect">
+            <a:avLst/>
+          </a:prstGeom>
+          <a:solidFill>
+            <a:schemeClr val="dk1"/>
+          </a:solidFill>
+          <a:ln>
+            <a:noFill/>
+          </a:ln>
+        </p:spPr>
+        <p:txBody>
+          <a:bodyPr spcFirstLastPara="1" wrap="square" lIns="91425" tIns="91425" rIns="91425" bIns="91425" anchor="ctr" anchorCtr="0">
+            <a:noAutofit/>
+          </a:bodyPr>
+          <a:lstStyle/>
+          <a:p>
+            <a:pPr marL="0" lvl="0" indent="0" algn="l" rtl="0">
+              <a:spcBef>
+                <a:spcPts val="0"/>
+              </a:spcBef>
+              <a:spcAft>
+                <a:spcPts val="0"/>
+              </a:spcAft>
+              <a:buNone/>
+            </a:pPr>
+            <a:endParaRPr/>
+          </a:p>
+        </p:txBody>
+      </p:sp>
+      <p:sp>
+        <p:nvSpPr>
+          <p:cNvPr id="6" name="Google Shape;349;p50">
+            <a:extLst>
+              <a:ext uri="{FF2B5EF4-FFF2-40B4-BE49-F238E27FC236}">
+                <a16:creationId xmlns:a16="http://schemas.microsoft.com/office/drawing/2014/main" id="{F31D0C12-8BFD-F991-0052-6E2C6311EFF5}"/>
+              </a:ext>
+            </a:extLst>
+          </p:cNvPr>
+          <p:cNvSpPr/>
+          <p:nvPr/>
+        </p:nvSpPr>
+        <p:spPr>
+          <a:xfrm>
+            <a:off x="-3637100" y="2144100"/>
+            <a:ext cx="6517800" cy="855300"/>
+          </a:xfrm>
+          <a:prstGeom prst="rect">
+            <a:avLst/>
+          </a:prstGeom>
+          <a:solidFill>
+            <a:schemeClr val="dk1"/>
+          </a:solidFill>
+          <a:ln>
+            <a:noFill/>
+          </a:ln>
+        </p:spPr>
+        <p:txBody>
+          <a:bodyPr spcFirstLastPara="1" wrap="square" lIns="91425" tIns="91425" rIns="91425" bIns="91425" anchor="ctr" anchorCtr="0">
+            <a:noAutofit/>
+          </a:bodyPr>
+          <a:lstStyle/>
+          <a:p>
+            <a:pPr marL="0" lvl="0" indent="0" algn="l" rtl="0">
+              <a:spcBef>
+                <a:spcPts val="0"/>
+              </a:spcBef>
+              <a:spcAft>
+                <a:spcPts val="0"/>
+              </a:spcAft>
+              <a:buNone/>
+            </a:pPr>
+            <a:endParaRPr/>
+          </a:p>
+        </p:txBody>
+      </p:sp>
+    </p:spTree>
+    <p:extLst>
+      <p:ext uri="{BB962C8B-B14F-4D97-AF65-F5344CB8AC3E}">
+        <p14:creationId xmlns:p14="http://schemas.microsoft.com/office/powerpoint/2010/main" val="3565529623"/>
+      </p:ext>
+    </p:extLst>
+  </p:cSld>
+  <p:clrMapOvr>
+    <a:masterClrMapping/>
+  </p:clrMapOvr>
+</p:sld>
+</file>
+
+<file path=ppt/slides/slide19.xml><?xml version="1.0" encoding="utf-8"?>
 <p:sld xmlns:a="http://schemas.openxmlformats.org/drawingml/2006/main" xmlns:r="http://schemas.openxmlformats.org/officeDocument/2006/relationships" xmlns:p="http://schemas.openxmlformats.org/presentationml/2006/main">
   <p:cSld>
     <p:spTree>
@@ -11682,494 +13416,6 @@
         </p:txBody>
       </p:sp>
     </p:spTree>
-  </p:cSld>
-  <p:clrMapOvr>
-    <a:masterClrMapping/>
-  </p:clrMapOvr>
-</p:sld>
-</file>
-
-<file path=ppt/slides/slide17.xml><?xml version="1.0" encoding="utf-8"?>
-<p:sld xmlns:a="http://schemas.openxmlformats.org/drawingml/2006/main" xmlns:r="http://schemas.openxmlformats.org/officeDocument/2006/relationships" xmlns:p="http://schemas.openxmlformats.org/presentationml/2006/main">
-  <p:cSld>
-    <p:spTree>
-      <p:nvGrpSpPr>
-        <p:cNvPr id="1" name="Shape 400"/>
-        <p:cNvGrpSpPr/>
-        <p:nvPr/>
-      </p:nvGrpSpPr>
-      <p:grpSpPr>
-        <a:xfrm>
-          <a:off x="0" y="0"/>
-          <a:ext cx="0" cy="0"/>
-          <a:chOff x="0" y="0"/>
-          <a:chExt cx="0" cy="0"/>
-        </a:xfrm>
-      </p:grpSpPr>
-      <p:sp>
-        <p:nvSpPr>
-          <p:cNvPr id="401" name="Google Shape;401;p54"/>
-          <p:cNvSpPr txBox="1">
-            <a:spLocks noGrp="1"/>
-          </p:cNvSpPr>
-          <p:nvPr>
-            <p:ph type="title"/>
-          </p:nvPr>
-        </p:nvSpPr>
-        <p:spPr>
-          <a:xfrm>
-            <a:off x="713225" y="539500"/>
-            <a:ext cx="7717500" cy="612900"/>
-          </a:xfrm>
-          <a:prstGeom prst="rect">
-            <a:avLst/>
-          </a:prstGeom>
-        </p:spPr>
-        <p:txBody>
-          <a:bodyPr spcFirstLastPara="1" wrap="square" lIns="91425" tIns="91425" rIns="91425" bIns="91425" anchor="t" anchorCtr="0">
-            <a:noAutofit/>
-          </a:bodyPr>
-          <a:lstStyle/>
-          <a:p>
-            <a:pPr marL="0" lvl="0" indent="0" algn="l" rtl="0">
-              <a:spcBef>
-                <a:spcPts val="0"/>
-              </a:spcBef>
-              <a:spcAft>
-                <a:spcPts val="0"/>
-              </a:spcAft>
-              <a:buNone/>
-            </a:pPr>
-            <a:r>
-              <a:rPr lang="en" dirty="0"/>
-              <a:t>References</a:t>
-            </a:r>
-            <a:endParaRPr dirty="0"/>
-          </a:p>
-        </p:txBody>
-      </p:sp>
-      <p:sp>
-        <p:nvSpPr>
-          <p:cNvPr id="402" name="Google Shape;402;p54"/>
-          <p:cNvSpPr txBox="1">
-            <a:spLocks noGrp="1"/>
-          </p:cNvSpPr>
-          <p:nvPr>
-            <p:ph type="body" idx="1"/>
-          </p:nvPr>
-        </p:nvSpPr>
-        <p:spPr>
-          <a:xfrm>
-            <a:off x="417591" y="1283088"/>
-            <a:ext cx="6753230" cy="2242200"/>
-          </a:xfrm>
-          <a:prstGeom prst="rect">
-            <a:avLst/>
-          </a:prstGeom>
-        </p:spPr>
-        <p:txBody>
-          <a:bodyPr spcFirstLastPara="1" wrap="square" lIns="91425" tIns="91425" rIns="91425" bIns="91425" anchor="t" anchorCtr="0">
-            <a:noAutofit/>
-          </a:bodyPr>
-          <a:lstStyle/>
-          <a:p>
-            <a:pPr marL="342900" lvl="0" indent="-342900">
-              <a:buSzPts val="1100"/>
-              <a:buAutoNum type="arabicPeriod"/>
-            </a:pPr>
-            <a:r>
-              <a:rPr lang="en-US" dirty="0">
-                <a:hlinkClick r:id="rId3"/>
-              </a:rPr>
-              <a:t>https://www.cisco.com/site/us/en/learn/topics/security/what-is-cybersecurity.html</a:t>
-            </a:r>
-            <a:endParaRPr lang="en-US" dirty="0"/>
-          </a:p>
-          <a:p>
-            <a:pPr marL="342900" lvl="0" indent="-342900">
-              <a:buSzPts val="1100"/>
-              <a:buAutoNum type="arabicPeriod"/>
-            </a:pPr>
-            <a:r>
-              <a:rPr lang="en-US" dirty="0">
-                <a:hlinkClick r:id="rId4"/>
-              </a:rPr>
-              <a:t>https://www.hotcourses.ae/study-abroad-info/careers-prospects/cybersecurity-jobs/</a:t>
-            </a:r>
-            <a:endParaRPr lang="en-US" dirty="0"/>
-          </a:p>
-          <a:p>
-            <a:pPr marL="342900" lvl="0" indent="-342900">
-              <a:buSzPts val="1100"/>
-              <a:buAutoNum type="arabicPeriod"/>
-            </a:pPr>
-            <a:r>
-              <a:rPr lang="en-US" dirty="0">
-                <a:hlinkClick r:id="rId5"/>
-              </a:rPr>
-              <a:t>https://www.salaryexpert.com/salary/job/cyber-security-analyst/egypt#:~:text=202.98%20%D8%AC.%D9%85.%E2%80%8F%20(,%E2%80%8F</a:t>
-            </a:r>
-            <a:r>
-              <a:rPr lang="en-US" dirty="0"/>
-              <a:t>.</a:t>
-            </a:r>
-          </a:p>
-          <a:p>
-            <a:pPr marL="342900" lvl="0" indent="-342900">
-              <a:buSzPts val="1100"/>
-              <a:buAutoNum type="arabicPeriod"/>
-            </a:pPr>
-            <a:r>
-              <a:rPr lang="en-US" dirty="0">
-                <a:hlinkClick r:id="rId6"/>
-              </a:rPr>
-              <a:t>https://www.indeed.com/career/cybersecurity-analyst/salaries</a:t>
-            </a:r>
-            <a:endParaRPr lang="en-US" dirty="0"/>
-          </a:p>
-          <a:p>
-            <a:pPr marL="342900" lvl="0" indent="-342900">
-              <a:buSzPts val="1100"/>
-              <a:buAutoNum type="arabicPeriod"/>
-            </a:pPr>
-            <a:r>
-              <a:rPr lang="en-US" dirty="0"/>
-              <a:t>https://encryptorium.medium.com/understanding-cybersecurity-teams-red-blue-green-white-and-more-a114ada67021</a:t>
-            </a:r>
-          </a:p>
-          <a:p>
-            <a:pPr marL="342900" lvl="0" indent="-342900">
-              <a:buSzPts val="1100"/>
-              <a:buAutoNum type="arabicPeriod"/>
-            </a:pPr>
-            <a:endParaRPr lang="en-US" dirty="0"/>
-          </a:p>
-          <a:p>
-            <a:pPr marL="342900" lvl="0" indent="-342900">
-              <a:buSzPts val="1100"/>
-              <a:buAutoNum type="arabicPeriod"/>
-            </a:pPr>
-            <a:endParaRPr lang="en-US" dirty="0"/>
-          </a:p>
-          <a:p>
-            <a:pPr marL="0" lvl="0" indent="0">
-              <a:buSzPts val="1100"/>
-              <a:buNone/>
-            </a:pPr>
-            <a:endParaRPr dirty="0"/>
-          </a:p>
-        </p:txBody>
-      </p:sp>
-      <p:cxnSp>
-        <p:nvCxnSpPr>
-          <p:cNvPr id="403" name="Google Shape;403;p54"/>
-          <p:cNvCxnSpPr/>
-          <p:nvPr/>
-        </p:nvCxnSpPr>
-        <p:spPr>
-          <a:xfrm>
-            <a:off x="-19500" y="1152025"/>
-            <a:ext cx="9183000" cy="0"/>
-          </a:xfrm>
-          <a:prstGeom prst="straightConnector1">
-            <a:avLst/>
-          </a:prstGeom>
-          <a:noFill/>
-          <a:ln w="9525" cap="flat" cmpd="sng">
-            <a:solidFill>
-              <a:schemeClr val="dk1"/>
-            </a:solidFill>
-            <a:prstDash val="solid"/>
-            <a:round/>
-            <a:headEnd type="none" w="med" len="med"/>
-            <a:tailEnd type="none" w="med" len="med"/>
-          </a:ln>
-        </p:spPr>
-      </p:cxnSp>
-    </p:spTree>
-  </p:cSld>
-  <p:clrMapOvr>
-    <a:masterClrMapping/>
-  </p:clrMapOvr>
-</p:sld>
-</file>
-
-<file path=ppt/slides/slide18.xml><?xml version="1.0" encoding="utf-8"?>
-<p:sld xmlns:a="http://schemas.openxmlformats.org/drawingml/2006/main" xmlns:r="http://schemas.openxmlformats.org/officeDocument/2006/relationships" xmlns:p="http://schemas.openxmlformats.org/presentationml/2006/main">
-  <p:cSld>
-    <p:spTree>
-      <p:nvGrpSpPr>
-        <p:cNvPr id="1" name="Shape 407">
-          <a:extLst>
-            <a:ext uri="{FF2B5EF4-FFF2-40B4-BE49-F238E27FC236}">
-              <a16:creationId xmlns:a16="http://schemas.microsoft.com/office/drawing/2014/main" id="{5E6CE323-097A-41F9-F294-78BB59E46075}"/>
-            </a:ext>
-          </a:extLst>
-        </p:cNvPr>
-        <p:cNvGrpSpPr/>
-        <p:nvPr/>
-      </p:nvGrpSpPr>
-      <p:grpSpPr>
-        <a:xfrm>
-          <a:off x="0" y="0"/>
-          <a:ext cx="0" cy="0"/>
-          <a:chOff x="0" y="0"/>
-          <a:chExt cx="0" cy="0"/>
-        </a:xfrm>
-      </p:grpSpPr>
-      <p:grpSp>
-        <p:nvGrpSpPr>
-          <p:cNvPr id="408" name="Google Shape;408;p55">
-            <a:extLst>
-              <a:ext uri="{FF2B5EF4-FFF2-40B4-BE49-F238E27FC236}">
-                <a16:creationId xmlns:a16="http://schemas.microsoft.com/office/drawing/2014/main" id="{EA9ED314-FF67-E3E2-4868-88176D04B42A}"/>
-              </a:ext>
-            </a:extLst>
-          </p:cNvPr>
-          <p:cNvGrpSpPr/>
-          <p:nvPr/>
-        </p:nvGrpSpPr>
-        <p:grpSpPr>
-          <a:xfrm flipH="1">
-            <a:off x="0" y="1403775"/>
-            <a:ext cx="9144125" cy="855300"/>
-            <a:chOff x="0" y="1403775"/>
-            <a:chExt cx="9144125" cy="855300"/>
-          </a:xfrm>
-        </p:grpSpPr>
-        <p:sp>
-          <p:nvSpPr>
-            <p:cNvPr id="409" name="Google Shape;409;p55">
-              <a:extLst>
-                <a:ext uri="{FF2B5EF4-FFF2-40B4-BE49-F238E27FC236}">
-                  <a16:creationId xmlns:a16="http://schemas.microsoft.com/office/drawing/2014/main" id="{B76F3175-382C-E82D-42A7-B939290DD649}"/>
-                </a:ext>
-              </a:extLst>
-            </p:cNvPr>
-            <p:cNvSpPr/>
-            <p:nvPr/>
-          </p:nvSpPr>
-          <p:spPr>
-            <a:xfrm>
-              <a:off x="0" y="1403775"/>
-              <a:ext cx="713400" cy="855300"/>
-            </a:xfrm>
-            <a:prstGeom prst="rect">
-              <a:avLst/>
-            </a:prstGeom>
-            <a:solidFill>
-              <a:schemeClr val="dk1"/>
-            </a:solidFill>
-            <a:ln w="9525" cap="flat" cmpd="sng">
-              <a:solidFill>
-                <a:schemeClr val="dk1"/>
-              </a:solidFill>
-              <a:prstDash val="solid"/>
-              <a:round/>
-              <a:headEnd type="none" w="sm" len="sm"/>
-              <a:tailEnd type="none" w="sm" len="sm"/>
-            </a:ln>
-          </p:spPr>
-          <p:txBody>
-            <a:bodyPr spcFirstLastPara="1" wrap="square" lIns="91425" tIns="91425" rIns="91425" bIns="91425" anchor="ctr" anchorCtr="0">
-              <a:noAutofit/>
-            </a:bodyPr>
-            <a:lstStyle/>
-            <a:p>
-              <a:pPr marL="0" lvl="0" indent="0" algn="l" rtl="0">
-                <a:spcBef>
-                  <a:spcPts val="0"/>
-                </a:spcBef>
-                <a:spcAft>
-                  <a:spcPts val="0"/>
-                </a:spcAft>
-                <a:buNone/>
-              </a:pPr>
-              <a:endParaRPr/>
-            </a:p>
-          </p:txBody>
-        </p:sp>
-        <p:sp>
-          <p:nvSpPr>
-            <p:cNvPr id="410" name="Google Shape;410;p55">
-              <a:extLst>
-                <a:ext uri="{FF2B5EF4-FFF2-40B4-BE49-F238E27FC236}">
-                  <a16:creationId xmlns:a16="http://schemas.microsoft.com/office/drawing/2014/main" id="{97F99F69-33BA-FC82-7D0A-912F337042D3}"/>
-                </a:ext>
-              </a:extLst>
-            </p:cNvPr>
-            <p:cNvSpPr/>
-            <p:nvPr/>
-          </p:nvSpPr>
-          <p:spPr>
-            <a:xfrm>
-              <a:off x="2626325" y="1403775"/>
-              <a:ext cx="6517800" cy="855300"/>
-            </a:xfrm>
-            <a:prstGeom prst="rect">
-              <a:avLst/>
-            </a:prstGeom>
-            <a:solidFill>
-              <a:schemeClr val="dk1"/>
-            </a:solidFill>
-            <a:ln>
-              <a:noFill/>
-            </a:ln>
-          </p:spPr>
-          <p:txBody>
-            <a:bodyPr spcFirstLastPara="1" wrap="square" lIns="91425" tIns="91425" rIns="91425" bIns="91425" anchor="ctr" anchorCtr="0">
-              <a:noAutofit/>
-            </a:bodyPr>
-            <a:lstStyle/>
-            <a:p>
-              <a:pPr marL="0" lvl="0" indent="0" algn="l" rtl="0">
-                <a:spcBef>
-                  <a:spcPts val="0"/>
-                </a:spcBef>
-                <a:spcAft>
-                  <a:spcPts val="0"/>
-                </a:spcAft>
-                <a:buNone/>
-              </a:pPr>
-              <a:endParaRPr/>
-            </a:p>
-          </p:txBody>
-        </p:sp>
-      </p:grpSp>
-      <p:cxnSp>
-        <p:nvCxnSpPr>
-          <p:cNvPr id="411" name="Google Shape;411;p55">
-            <a:extLst>
-              <a:ext uri="{FF2B5EF4-FFF2-40B4-BE49-F238E27FC236}">
-                <a16:creationId xmlns:a16="http://schemas.microsoft.com/office/drawing/2014/main" id="{53B482B0-BBCA-EB96-A99A-6345D7D148E4}"/>
-              </a:ext>
-            </a:extLst>
-          </p:cNvPr>
-          <p:cNvCxnSpPr/>
-          <p:nvPr/>
-        </p:nvCxnSpPr>
-        <p:spPr>
-          <a:xfrm>
-            <a:off x="-19500" y="3837900"/>
-            <a:ext cx="9183000" cy="0"/>
-          </a:xfrm>
-          <a:prstGeom prst="straightConnector1">
-            <a:avLst/>
-          </a:prstGeom>
-          <a:noFill/>
-          <a:ln w="9525" cap="flat" cmpd="sng">
-            <a:solidFill>
-              <a:schemeClr val="dk1"/>
-            </a:solidFill>
-            <a:prstDash val="solid"/>
-            <a:round/>
-            <a:headEnd type="none" w="med" len="med"/>
-            <a:tailEnd type="none" w="med" len="med"/>
-          </a:ln>
-        </p:spPr>
-      </p:cxnSp>
-      <p:sp>
-        <p:nvSpPr>
-          <p:cNvPr id="412" name="Google Shape;412;p55">
-            <a:extLst>
-              <a:ext uri="{FF2B5EF4-FFF2-40B4-BE49-F238E27FC236}">
-                <a16:creationId xmlns:a16="http://schemas.microsoft.com/office/drawing/2014/main" id="{F58C900C-0E81-A372-F301-181CD3EF1528}"/>
-              </a:ext>
-            </a:extLst>
-          </p:cNvPr>
-          <p:cNvSpPr txBox="1">
-            <a:spLocks noGrp="1"/>
-          </p:cNvSpPr>
-          <p:nvPr>
-            <p:ph type="title"/>
-          </p:nvPr>
-        </p:nvSpPr>
-        <p:spPr>
-          <a:xfrm flipH="1">
-            <a:off x="2101800" y="2998800"/>
-            <a:ext cx="6329100" cy="841800"/>
-          </a:xfrm>
-          <a:prstGeom prst="rect">
-            <a:avLst/>
-          </a:prstGeom>
-        </p:spPr>
-        <p:txBody>
-          <a:bodyPr spcFirstLastPara="1" wrap="square" lIns="91425" tIns="91425" rIns="91425" bIns="91425" anchor="b" anchorCtr="0">
-            <a:noAutofit/>
-          </a:bodyPr>
-          <a:lstStyle/>
-          <a:p>
-            <a:pPr marL="0" lvl="0" indent="0" algn="r" rtl="0">
-              <a:spcBef>
-                <a:spcPts val="0"/>
-              </a:spcBef>
-              <a:spcAft>
-                <a:spcPts val="0"/>
-              </a:spcAft>
-              <a:buNone/>
-            </a:pPr>
-            <a:r>
-              <a:rPr lang="en" dirty="0"/>
-              <a:t>Future Plans</a:t>
-            </a:r>
-            <a:endParaRPr dirty="0"/>
-          </a:p>
-        </p:txBody>
-      </p:sp>
-      <p:sp>
-        <p:nvSpPr>
-          <p:cNvPr id="413" name="Google Shape;413;p55">
-            <a:extLst>
-              <a:ext uri="{FF2B5EF4-FFF2-40B4-BE49-F238E27FC236}">
-                <a16:creationId xmlns:a16="http://schemas.microsoft.com/office/drawing/2014/main" id="{18C06620-A238-E437-657B-50DF12082602}"/>
-              </a:ext>
-            </a:extLst>
-          </p:cNvPr>
-          <p:cNvSpPr txBox="1">
-            <a:spLocks noGrp="1"/>
-          </p:cNvSpPr>
-          <p:nvPr>
-            <p:ph type="title" idx="2"/>
-          </p:nvPr>
-        </p:nvSpPr>
-        <p:spPr>
-          <a:xfrm flipH="1">
-            <a:off x="6517800" y="1320075"/>
-            <a:ext cx="1913100" cy="1022700"/>
-          </a:xfrm>
-          <a:prstGeom prst="rect">
-            <a:avLst/>
-          </a:prstGeom>
-        </p:spPr>
-        <p:txBody>
-          <a:bodyPr spcFirstLastPara="1" wrap="square" lIns="91425" tIns="91425" rIns="91425" bIns="91425" anchor="ctr" anchorCtr="0">
-            <a:noAutofit/>
-          </a:bodyPr>
-          <a:lstStyle/>
-          <a:p>
-            <a:pPr marL="0" lvl="0" indent="0" algn="ctr" rtl="0">
-              <a:spcBef>
-                <a:spcPts val="0"/>
-              </a:spcBef>
-              <a:spcAft>
-                <a:spcPts val="0"/>
-              </a:spcAft>
-              <a:buNone/>
-            </a:pPr>
-            <a:r>
-              <a:rPr lang="en" dirty="0"/>
-              <a:t>06</a:t>
-            </a:r>
-            <a:endParaRPr dirty="0"/>
-          </a:p>
-        </p:txBody>
-      </p:sp>
-    </p:spTree>
-    <p:extLst>
-      <p:ext uri="{BB962C8B-B14F-4D97-AF65-F5344CB8AC3E}">
-        <p14:creationId xmlns:p14="http://schemas.microsoft.com/office/powerpoint/2010/main" val="423929822"/>
-      </p:ext>
-    </p:extLst>
   </p:cSld>
   <p:clrMapOvr>
     <a:masterClrMapping/>
@@ -13324,6 +14570,507 @@
 </p:sld>
 </file>
 
+<file path=ppt/slides/slide20.xml><?xml version="1.0" encoding="utf-8"?>
+<p:sld xmlns:a="http://schemas.openxmlformats.org/drawingml/2006/main" xmlns:r="http://schemas.openxmlformats.org/officeDocument/2006/relationships" xmlns:p="http://schemas.openxmlformats.org/presentationml/2006/main">
+  <p:cSld>
+    <p:spTree>
+      <p:nvGrpSpPr>
+        <p:cNvPr id="1" name="Shape 400"/>
+        <p:cNvGrpSpPr/>
+        <p:nvPr/>
+      </p:nvGrpSpPr>
+      <p:grpSpPr>
+        <a:xfrm>
+          <a:off x="0" y="0"/>
+          <a:ext cx="0" cy="0"/>
+          <a:chOff x="0" y="0"/>
+          <a:chExt cx="0" cy="0"/>
+        </a:xfrm>
+      </p:grpSpPr>
+      <p:sp>
+        <p:nvSpPr>
+          <p:cNvPr id="401" name="Google Shape;401;p54"/>
+          <p:cNvSpPr txBox="1">
+            <a:spLocks noGrp="1"/>
+          </p:cNvSpPr>
+          <p:nvPr>
+            <p:ph type="title"/>
+          </p:nvPr>
+        </p:nvSpPr>
+        <p:spPr>
+          <a:xfrm>
+            <a:off x="713225" y="539500"/>
+            <a:ext cx="7717500" cy="612900"/>
+          </a:xfrm>
+          <a:prstGeom prst="rect">
+            <a:avLst/>
+          </a:prstGeom>
+        </p:spPr>
+        <p:txBody>
+          <a:bodyPr spcFirstLastPara="1" wrap="square" lIns="91425" tIns="91425" rIns="91425" bIns="91425" anchor="t" anchorCtr="0">
+            <a:noAutofit/>
+          </a:bodyPr>
+          <a:lstStyle/>
+          <a:p>
+            <a:pPr marL="0" lvl="0" indent="0" algn="l" rtl="0">
+              <a:spcBef>
+                <a:spcPts val="0"/>
+              </a:spcBef>
+              <a:spcAft>
+                <a:spcPts val="0"/>
+              </a:spcAft>
+              <a:buNone/>
+            </a:pPr>
+            <a:r>
+              <a:rPr lang="en" dirty="0"/>
+              <a:t>References</a:t>
+            </a:r>
+            <a:endParaRPr dirty="0"/>
+          </a:p>
+        </p:txBody>
+      </p:sp>
+      <p:sp>
+        <p:nvSpPr>
+          <p:cNvPr id="402" name="Google Shape;402;p54"/>
+          <p:cNvSpPr txBox="1">
+            <a:spLocks noGrp="1"/>
+          </p:cNvSpPr>
+          <p:nvPr>
+            <p:ph type="body" idx="1"/>
+          </p:nvPr>
+        </p:nvSpPr>
+        <p:spPr>
+          <a:xfrm>
+            <a:off x="417591" y="1283088"/>
+            <a:ext cx="6753230" cy="2242200"/>
+          </a:xfrm>
+          <a:prstGeom prst="rect">
+            <a:avLst/>
+          </a:prstGeom>
+        </p:spPr>
+        <p:txBody>
+          <a:bodyPr spcFirstLastPara="1" wrap="square" lIns="91425" tIns="91425" rIns="91425" bIns="91425" anchor="t" anchorCtr="0">
+            <a:noAutofit/>
+          </a:bodyPr>
+          <a:lstStyle/>
+          <a:p>
+            <a:pPr marL="342900" lvl="0" indent="-342900">
+              <a:buSzPts val="1100"/>
+              <a:buAutoNum type="arabicPeriod"/>
+            </a:pPr>
+            <a:r>
+              <a:rPr lang="en-US" dirty="0">
+                <a:hlinkClick r:id="rId3"/>
+              </a:rPr>
+              <a:t>https://www.cisco.com/site/us/en/learn/topics/security/what-is-cybersecurity.html</a:t>
+            </a:r>
+            <a:endParaRPr lang="en-US" dirty="0"/>
+          </a:p>
+          <a:p>
+            <a:pPr marL="342900" lvl="0" indent="-342900">
+              <a:buSzPts val="1100"/>
+              <a:buAutoNum type="arabicPeriod"/>
+            </a:pPr>
+            <a:r>
+              <a:rPr lang="en-US" dirty="0">
+                <a:hlinkClick r:id="rId4"/>
+              </a:rPr>
+              <a:t>https://www.hotcourses.ae/study-abroad-info/careers-prospects/cybersecurity-jobs/</a:t>
+            </a:r>
+            <a:endParaRPr lang="en-US" dirty="0"/>
+          </a:p>
+          <a:p>
+            <a:pPr marL="342900" lvl="0" indent="-342900">
+              <a:buSzPts val="1100"/>
+              <a:buAutoNum type="arabicPeriod"/>
+            </a:pPr>
+            <a:r>
+              <a:rPr lang="en-US" dirty="0">
+                <a:hlinkClick r:id="rId5"/>
+              </a:rPr>
+              <a:t>https://www.salaryexpert.com/salary/job/cyber-security-analyst/egypt#:~:text=202.98%20%D8%AC.%D9%85.%E2%80%8F%20(,%E2%80%8F</a:t>
+            </a:r>
+            <a:r>
+              <a:rPr lang="en-US" dirty="0"/>
+              <a:t>.</a:t>
+            </a:r>
+          </a:p>
+          <a:p>
+            <a:pPr marL="342900" lvl="0" indent="-342900">
+              <a:buSzPts val="1100"/>
+              <a:buAutoNum type="arabicPeriod"/>
+            </a:pPr>
+            <a:r>
+              <a:rPr lang="en-US" dirty="0">
+                <a:hlinkClick r:id="rId6"/>
+              </a:rPr>
+              <a:t>https://www.indeed.com/career/cybersecurity-analyst/salaries</a:t>
+            </a:r>
+            <a:endParaRPr lang="en-US" dirty="0"/>
+          </a:p>
+          <a:p>
+            <a:pPr marL="342900" lvl="0" indent="-342900">
+              <a:buSzPts val="1100"/>
+              <a:buAutoNum type="arabicPeriod"/>
+            </a:pPr>
+            <a:r>
+              <a:rPr lang="en-US" dirty="0">
+                <a:hlinkClick r:id="rId7"/>
+              </a:rPr>
+              <a:t>https://encryptorium.medium.com/understanding-cybersecurity-teams-red-blue-green-white-and-more-a114ada67021</a:t>
+            </a:r>
+            <a:endParaRPr lang="en-US" dirty="0"/>
+          </a:p>
+          <a:p>
+            <a:pPr marL="342900" lvl="0" indent="-342900">
+              <a:buSzPts val="1100"/>
+              <a:buAutoNum type="arabicPeriod"/>
+            </a:pPr>
+            <a:r>
+              <a:rPr lang="en-US" dirty="0"/>
+              <a:t>https://github.com/TalEliyahu/awesome-security-newsletters</a:t>
+            </a:r>
+          </a:p>
+          <a:p>
+            <a:pPr marL="342900" lvl="0" indent="-342900">
+              <a:buSzPts val="1100"/>
+              <a:buAutoNum type="arabicPeriod"/>
+            </a:pPr>
+            <a:endParaRPr lang="en-US" dirty="0"/>
+          </a:p>
+          <a:p>
+            <a:pPr marL="342900" lvl="0" indent="-342900">
+              <a:buSzPts val="1100"/>
+              <a:buAutoNum type="arabicPeriod"/>
+            </a:pPr>
+            <a:endParaRPr lang="en-US" dirty="0"/>
+          </a:p>
+          <a:p>
+            <a:pPr marL="0" lvl="0" indent="0">
+              <a:buSzPts val="1100"/>
+              <a:buNone/>
+            </a:pPr>
+            <a:endParaRPr dirty="0"/>
+          </a:p>
+        </p:txBody>
+      </p:sp>
+      <p:cxnSp>
+        <p:nvCxnSpPr>
+          <p:cNvPr id="403" name="Google Shape;403;p54"/>
+          <p:cNvCxnSpPr/>
+          <p:nvPr/>
+        </p:nvCxnSpPr>
+        <p:spPr>
+          <a:xfrm>
+            <a:off x="-19500" y="1152025"/>
+            <a:ext cx="9183000" cy="0"/>
+          </a:xfrm>
+          <a:prstGeom prst="straightConnector1">
+            <a:avLst/>
+          </a:prstGeom>
+          <a:noFill/>
+          <a:ln w="9525" cap="flat" cmpd="sng">
+            <a:solidFill>
+              <a:schemeClr val="dk1"/>
+            </a:solidFill>
+            <a:prstDash val="solid"/>
+            <a:round/>
+            <a:headEnd type="none" w="med" len="med"/>
+            <a:tailEnd type="none" w="med" len="med"/>
+          </a:ln>
+        </p:spPr>
+      </p:cxnSp>
+    </p:spTree>
+  </p:cSld>
+  <p:clrMapOvr>
+    <a:masterClrMapping/>
+  </p:clrMapOvr>
+</p:sld>
+</file>
+
+<file path=ppt/slides/slide21.xml><?xml version="1.0" encoding="utf-8"?>
+<p:sld xmlns:a="http://schemas.openxmlformats.org/drawingml/2006/main" xmlns:r="http://schemas.openxmlformats.org/officeDocument/2006/relationships" xmlns:p="http://schemas.openxmlformats.org/presentationml/2006/main">
+  <p:cSld>
+    <p:spTree>
+      <p:nvGrpSpPr>
+        <p:cNvPr id="1" name="Shape 407">
+          <a:extLst>
+            <a:ext uri="{FF2B5EF4-FFF2-40B4-BE49-F238E27FC236}">
+              <a16:creationId xmlns:a16="http://schemas.microsoft.com/office/drawing/2014/main" id="{5E6CE323-097A-41F9-F294-78BB59E46075}"/>
+            </a:ext>
+          </a:extLst>
+        </p:cNvPr>
+        <p:cNvGrpSpPr/>
+        <p:nvPr/>
+      </p:nvGrpSpPr>
+      <p:grpSpPr>
+        <a:xfrm>
+          <a:off x="0" y="0"/>
+          <a:ext cx="0" cy="0"/>
+          <a:chOff x="0" y="0"/>
+          <a:chExt cx="0" cy="0"/>
+        </a:xfrm>
+      </p:grpSpPr>
+      <p:grpSp>
+        <p:nvGrpSpPr>
+          <p:cNvPr id="408" name="Google Shape;408;p55">
+            <a:extLst>
+              <a:ext uri="{FF2B5EF4-FFF2-40B4-BE49-F238E27FC236}">
+                <a16:creationId xmlns:a16="http://schemas.microsoft.com/office/drawing/2014/main" id="{EA9ED314-FF67-E3E2-4868-88176D04B42A}"/>
+              </a:ext>
+            </a:extLst>
+          </p:cNvPr>
+          <p:cNvGrpSpPr/>
+          <p:nvPr/>
+        </p:nvGrpSpPr>
+        <p:grpSpPr>
+          <a:xfrm flipH="1">
+            <a:off x="0" y="1403775"/>
+            <a:ext cx="9144125" cy="855300"/>
+            <a:chOff x="0" y="1403775"/>
+            <a:chExt cx="9144125" cy="855300"/>
+          </a:xfrm>
+        </p:grpSpPr>
+        <p:sp>
+          <p:nvSpPr>
+            <p:cNvPr id="409" name="Google Shape;409;p55">
+              <a:extLst>
+                <a:ext uri="{FF2B5EF4-FFF2-40B4-BE49-F238E27FC236}">
+                  <a16:creationId xmlns:a16="http://schemas.microsoft.com/office/drawing/2014/main" id="{B76F3175-382C-E82D-42A7-B939290DD649}"/>
+                </a:ext>
+              </a:extLst>
+            </p:cNvPr>
+            <p:cNvSpPr/>
+            <p:nvPr/>
+          </p:nvSpPr>
+          <p:spPr>
+            <a:xfrm>
+              <a:off x="0" y="1403775"/>
+              <a:ext cx="713400" cy="855300"/>
+            </a:xfrm>
+            <a:prstGeom prst="rect">
+              <a:avLst/>
+            </a:prstGeom>
+            <a:solidFill>
+              <a:schemeClr val="dk1"/>
+            </a:solidFill>
+            <a:ln w="9525" cap="flat" cmpd="sng">
+              <a:solidFill>
+                <a:schemeClr val="dk1"/>
+              </a:solidFill>
+              <a:prstDash val="solid"/>
+              <a:round/>
+              <a:headEnd type="none" w="sm" len="sm"/>
+              <a:tailEnd type="none" w="sm" len="sm"/>
+            </a:ln>
+          </p:spPr>
+          <p:txBody>
+            <a:bodyPr spcFirstLastPara="1" wrap="square" lIns="91425" tIns="91425" rIns="91425" bIns="91425" anchor="ctr" anchorCtr="0">
+              <a:noAutofit/>
+            </a:bodyPr>
+            <a:lstStyle/>
+            <a:p>
+              <a:pPr marL="0" lvl="0" indent="0" algn="l" rtl="0">
+                <a:spcBef>
+                  <a:spcPts val="0"/>
+                </a:spcBef>
+                <a:spcAft>
+                  <a:spcPts val="0"/>
+                </a:spcAft>
+                <a:buNone/>
+              </a:pPr>
+              <a:endParaRPr/>
+            </a:p>
+          </p:txBody>
+        </p:sp>
+        <p:sp>
+          <p:nvSpPr>
+            <p:cNvPr id="410" name="Google Shape;410;p55">
+              <a:extLst>
+                <a:ext uri="{FF2B5EF4-FFF2-40B4-BE49-F238E27FC236}">
+                  <a16:creationId xmlns:a16="http://schemas.microsoft.com/office/drawing/2014/main" id="{97F99F69-33BA-FC82-7D0A-912F337042D3}"/>
+                </a:ext>
+              </a:extLst>
+            </p:cNvPr>
+            <p:cNvSpPr/>
+            <p:nvPr/>
+          </p:nvSpPr>
+          <p:spPr>
+            <a:xfrm>
+              <a:off x="2626325" y="1403775"/>
+              <a:ext cx="6517800" cy="855300"/>
+            </a:xfrm>
+            <a:prstGeom prst="rect">
+              <a:avLst/>
+            </a:prstGeom>
+            <a:solidFill>
+              <a:schemeClr val="dk1"/>
+            </a:solidFill>
+            <a:ln>
+              <a:noFill/>
+            </a:ln>
+          </p:spPr>
+          <p:txBody>
+            <a:bodyPr spcFirstLastPara="1" wrap="square" lIns="91425" tIns="91425" rIns="91425" bIns="91425" anchor="ctr" anchorCtr="0">
+              <a:noAutofit/>
+            </a:bodyPr>
+            <a:lstStyle/>
+            <a:p>
+              <a:pPr marL="0" lvl="0" indent="0" algn="l" rtl="0">
+                <a:spcBef>
+                  <a:spcPts val="0"/>
+                </a:spcBef>
+                <a:spcAft>
+                  <a:spcPts val="0"/>
+                </a:spcAft>
+                <a:buNone/>
+              </a:pPr>
+              <a:endParaRPr/>
+            </a:p>
+          </p:txBody>
+        </p:sp>
+      </p:grpSp>
+      <p:cxnSp>
+        <p:nvCxnSpPr>
+          <p:cNvPr id="411" name="Google Shape;411;p55">
+            <a:extLst>
+              <a:ext uri="{FF2B5EF4-FFF2-40B4-BE49-F238E27FC236}">
+                <a16:creationId xmlns:a16="http://schemas.microsoft.com/office/drawing/2014/main" id="{53B482B0-BBCA-EB96-A99A-6345D7D148E4}"/>
+              </a:ext>
+            </a:extLst>
+          </p:cNvPr>
+          <p:cNvCxnSpPr/>
+          <p:nvPr/>
+        </p:nvCxnSpPr>
+        <p:spPr>
+          <a:xfrm>
+            <a:off x="-19500" y="3837900"/>
+            <a:ext cx="9183000" cy="0"/>
+          </a:xfrm>
+          <a:prstGeom prst="straightConnector1">
+            <a:avLst/>
+          </a:prstGeom>
+          <a:noFill/>
+          <a:ln w="9525" cap="flat" cmpd="sng">
+            <a:solidFill>
+              <a:schemeClr val="dk1"/>
+            </a:solidFill>
+            <a:prstDash val="solid"/>
+            <a:round/>
+            <a:headEnd type="none" w="med" len="med"/>
+            <a:tailEnd type="none" w="med" len="med"/>
+          </a:ln>
+        </p:spPr>
+      </p:cxnSp>
+      <p:sp>
+        <p:nvSpPr>
+          <p:cNvPr id="412" name="Google Shape;412;p55">
+            <a:extLst>
+              <a:ext uri="{FF2B5EF4-FFF2-40B4-BE49-F238E27FC236}">
+                <a16:creationId xmlns:a16="http://schemas.microsoft.com/office/drawing/2014/main" id="{F58C900C-0E81-A372-F301-181CD3EF1528}"/>
+              </a:ext>
+            </a:extLst>
+          </p:cNvPr>
+          <p:cNvSpPr txBox="1">
+            <a:spLocks noGrp="1"/>
+          </p:cNvSpPr>
+          <p:nvPr>
+            <p:ph type="title"/>
+          </p:nvPr>
+        </p:nvSpPr>
+        <p:spPr>
+          <a:xfrm flipH="1">
+            <a:off x="2101800" y="2998800"/>
+            <a:ext cx="6329100" cy="841800"/>
+          </a:xfrm>
+          <a:prstGeom prst="rect">
+            <a:avLst/>
+          </a:prstGeom>
+        </p:spPr>
+        <p:txBody>
+          <a:bodyPr spcFirstLastPara="1" wrap="square" lIns="91425" tIns="91425" rIns="91425" bIns="91425" anchor="b" anchorCtr="0">
+            <a:noAutofit/>
+          </a:bodyPr>
+          <a:lstStyle/>
+          <a:p>
+            <a:pPr marL="0" lvl="0" indent="0" algn="r" rtl="0">
+              <a:spcBef>
+                <a:spcPts val="0"/>
+              </a:spcBef>
+              <a:spcAft>
+                <a:spcPts val="0"/>
+              </a:spcAft>
+              <a:buNone/>
+            </a:pPr>
+            <a:r>
+              <a:rPr lang="en" dirty="0"/>
+              <a:t>Future Plans</a:t>
+            </a:r>
+            <a:endParaRPr dirty="0"/>
+          </a:p>
+        </p:txBody>
+      </p:sp>
+      <p:sp>
+        <p:nvSpPr>
+          <p:cNvPr id="413" name="Google Shape;413;p55">
+            <a:extLst>
+              <a:ext uri="{FF2B5EF4-FFF2-40B4-BE49-F238E27FC236}">
+                <a16:creationId xmlns:a16="http://schemas.microsoft.com/office/drawing/2014/main" id="{18C06620-A238-E437-657B-50DF12082602}"/>
+              </a:ext>
+            </a:extLst>
+          </p:cNvPr>
+          <p:cNvSpPr txBox="1">
+            <a:spLocks noGrp="1"/>
+          </p:cNvSpPr>
+          <p:nvPr>
+            <p:ph type="title" idx="2"/>
+          </p:nvPr>
+        </p:nvSpPr>
+        <p:spPr>
+          <a:xfrm flipH="1">
+            <a:off x="6517800" y="1320075"/>
+            <a:ext cx="1913100" cy="1022700"/>
+          </a:xfrm>
+          <a:prstGeom prst="rect">
+            <a:avLst/>
+          </a:prstGeom>
+        </p:spPr>
+        <p:txBody>
+          <a:bodyPr spcFirstLastPara="1" wrap="square" lIns="91425" tIns="91425" rIns="91425" bIns="91425" anchor="ctr" anchorCtr="0">
+            <a:noAutofit/>
+          </a:bodyPr>
+          <a:lstStyle/>
+          <a:p>
+            <a:pPr marL="0" lvl="0" indent="0" algn="ctr" rtl="0">
+              <a:spcBef>
+                <a:spcPts val="0"/>
+              </a:spcBef>
+              <a:spcAft>
+                <a:spcPts val="0"/>
+              </a:spcAft>
+              <a:buNone/>
+            </a:pPr>
+            <a:r>
+              <a:rPr lang="en" dirty="0"/>
+              <a:t>06</a:t>
+            </a:r>
+            <a:endParaRPr dirty="0"/>
+          </a:p>
+        </p:txBody>
+      </p:sp>
+    </p:spTree>
+    <p:extLst>
+      <p:ext uri="{BB962C8B-B14F-4D97-AF65-F5344CB8AC3E}">
+        <p14:creationId xmlns:p14="http://schemas.microsoft.com/office/powerpoint/2010/main" val="423929822"/>
+      </p:ext>
+    </p:extLst>
+  </p:cSld>
+  <p:clrMapOvr>
+    <a:masterClrMapping/>
+  </p:clrMapOvr>
+</p:sld>
+</file>
+
 <file path=ppt/slides/slide3.xml><?xml version="1.0" encoding="utf-8"?>
 <p:sld xmlns:a="http://schemas.openxmlformats.org/drawingml/2006/main" xmlns:r="http://schemas.openxmlformats.org/officeDocument/2006/relationships" xmlns:p="http://schemas.openxmlformats.org/presentationml/2006/main">
   <p:cSld>
